--- a/docs/AI_Defense_Lab_Presentation.pptx
+++ b/docs/AI_Defense_Lab_Presentation.pptx
@@ -3116,7 +3116,7 @@
         <p:spPr>
           <a:xfrm>
             <a:off x="731520" y="1097280"/>
-            <a:ext cx="4114800" cy="411480"/>
+            <a:ext cx="4389120" cy="411480"/>
           </a:xfrm>
           <a:prstGeom prst="roundRect">
             <a:avLst/>
@@ -3154,7 +3154,7 @@
               </a:defRPr>
             </a:pPr>
             <a:r>
-              <a:t>AI-POWERED PAYMENT DEFENSE SYSTEM</a:t>
+              <a:t>HUMAN-CENTERED FINANCIAL DEFENSE</a:t>
             </a:r>
           </a:p>
         </p:txBody>
@@ -3194,26 +3194,26 @@
           </a:p>
           <a:p>
             <a:pPr>
-              <a:defRPr sz="2400" b="1">
+              <a:defRPr sz="2200" b="1">
                 <a:solidFill>
                   <a:srgbClr val="F59E0B"/>
                 </a:solidFill>
               </a:defRPr>
             </a:pPr>
             <a:r>
-              <a:t>The Multi-Layered Defense Triad for Payment Security</a:t>
+              <a:t>Protecting People, Payments &amp; Networks with the 3-Layer Defense Triad</a:t>
             </a:r>
           </a:p>
           <a:p>
             <a:pPr>
-              <a:defRPr sz="1400">
-                <a:solidFill>
-                  <a:srgbClr val="94A3B8"/>
-                </a:solidFill>
-              </a:defRPr>
-            </a:pPr>
-            <a:r>
-              <a:t>Red Team × Blue Team  •  Behavioral Biometrics  •  Fortified XGBoost  •  Graph Neural Networks</a:t>
+              <a:defRPr sz="1400" i="1">
+                <a:solidFill>
+                  <a:srgbClr val="94A3B8"/>
+                </a:solidFill>
+              </a:defRPr>
+            </a:pPr>
+            <a:r>
+              <a:t>"Because modern fraud doesn't hack computers — it hacks human psychology."</a:t>
             </a:r>
           </a:p>
         </p:txBody>
@@ -3233,7 +3233,7 @@
             <a:avLst/>
           </a:prstGeom>
           <a:solidFill>
-            <a:srgbClr val="1E293B"/>
+            <a:srgbClr val="161E2E"/>
           </a:solidFill>
           <a:ln w="19050">
             <a:solidFill>
@@ -3267,52 +3267,52 @@
               </a:defRPr>
             </a:pPr>
             <a:r>
-              <a:t>Layer 1: Biometrics</a:t>
-            </a:r>
-          </a:p>
-          <a:p>
-            <a:pPr algn="l">
-              <a:spcBef>
-                <a:spcPts val="600"/>
-              </a:spcBef>
-              <a:defRPr sz="1200">
-                <a:solidFill>
-                  <a:srgbClr val="94A3B8"/>
-                </a:solidFill>
-              </a:defRPr>
-            </a:pPr>
-            <a:r>
-              <a:t>• Captures live keystroke flight/dwell rhythm</a:t>
-            </a:r>
-          </a:p>
-          <a:p>
-            <a:pPr algn="l">
-              <a:spcBef>
-                <a:spcPts val="600"/>
-              </a:spcBef>
-              <a:defRPr sz="1200">
-                <a:solidFill>
-                  <a:srgbClr val="94A3B8"/>
-                </a:solidFill>
-              </a:defRPr>
-            </a:pPr>
-            <a:r>
-              <a:t>• Detects Coercion &amp; Digital Arrest scams</a:t>
-            </a:r>
-          </a:p>
-          <a:p>
-            <a:pPr algn="l">
-              <a:spcBef>
-                <a:spcPts val="600"/>
-              </a:spcBef>
-              <a:defRPr sz="1200">
-                <a:solidFill>
-                  <a:srgbClr val="94A3B8"/>
-                </a:solidFill>
-              </a:defRPr>
-            </a:pPr>
-            <a:r>
-              <a:t>• Flags remote desktop &amp; bot automation</a:t>
+              <a:t>1. Protect the Human</a:t>
+            </a:r>
+          </a:p>
+          <a:p>
+            <a:pPr algn="l">
+              <a:spcBef>
+                <a:spcPts val="500"/>
+              </a:spcBef>
+              <a:defRPr sz="1200">
+                <a:solidFill>
+                  <a:srgbClr val="FFFFFF"/>
+                </a:solidFill>
+              </a:defRPr>
+            </a:pPr>
+            <a:r>
+              <a:t>• Captures live keystroke rhythm &amp; stress</a:t>
+            </a:r>
+          </a:p>
+          <a:p>
+            <a:pPr algn="l">
+              <a:spcBef>
+                <a:spcPts val="500"/>
+              </a:spcBef>
+              <a:defRPr sz="1200">
+                <a:solidFill>
+                  <a:srgbClr val="FFFFFF"/>
+                </a:solidFill>
+              </a:defRPr>
+            </a:pPr>
+            <a:r>
+              <a:t>• Detects active phone calls &amp; coercion</a:t>
+            </a:r>
+          </a:p>
+          <a:p>
+            <a:pPr algn="l">
+              <a:spcBef>
+                <a:spcPts val="500"/>
+              </a:spcBef>
+              <a:defRPr sz="1200">
+                <a:solidFill>
+                  <a:srgbClr val="FFFFFF"/>
+                </a:solidFill>
+              </a:defRPr>
+            </a:pPr>
+            <a:r>
+              <a:t>• Intercepts Digital Arrest scams early</a:t>
             </a:r>
           </a:p>
         </p:txBody>
@@ -3332,7 +3332,7 @@
             <a:avLst/>
           </a:prstGeom>
           <a:solidFill>
-            <a:srgbClr val="1E293B"/>
+            <a:srgbClr val="161E2E"/>
           </a:solidFill>
           <a:ln w="19050">
             <a:solidFill>
@@ -3366,52 +3366,52 @@
               </a:defRPr>
             </a:pPr>
             <a:r>
-              <a:t>Layer 2: XGBoost V4</a:t>
-            </a:r>
-          </a:p>
-          <a:p>
-            <a:pPr algn="l">
-              <a:spcBef>
-                <a:spcPts val="600"/>
-              </a:spcBef>
-              <a:defRPr sz="1200">
-                <a:solidFill>
-                  <a:srgbClr val="94A3B8"/>
-                </a:solidFill>
-              </a:defRPr>
-            </a:pPr>
-            <a:r>
-              <a:t>• Server-side real-time feature store</a:t>
-            </a:r>
-          </a:p>
-          <a:p>
-            <a:pPr algn="l">
-              <a:spcBef>
-                <a:spcPts val="600"/>
-              </a:spcBef>
-              <a:defRPr sz="1200">
-                <a:solidFill>
-                  <a:srgbClr val="94A3B8"/>
-                </a:solidFill>
-              </a:defRPr>
-            </a:pPr>
-            <a:r>
-              <a:t>• Vectorized inference: 1,000 txs in 32ms</a:t>
-            </a:r>
-          </a:p>
-          <a:p>
-            <a:pPr algn="l">
-              <a:spcBef>
-                <a:spcPts val="600"/>
-              </a:spcBef>
-              <a:defRPr sz="1200">
-                <a:solidFill>
-                  <a:srgbClr val="94A3B8"/>
-                </a:solidFill>
-              </a:defRPr>
-            </a:pPr>
-            <a:r>
-              <a:t>• Exact TreeSHAP mathematical grounding</a:t>
+              <a:t>2. Secure the Transaction</a:t>
+            </a:r>
+          </a:p>
+          <a:p>
+            <a:pPr algn="l">
+              <a:spcBef>
+                <a:spcPts val="500"/>
+              </a:spcBef>
+              <a:defRPr sz="1200">
+                <a:solidFill>
+                  <a:srgbClr val="FFFFFF"/>
+                </a:solidFill>
+              </a:defRPr>
+            </a:pPr>
+            <a:r>
+              <a:t>• Server-side anti-tamper feature store</a:t>
+            </a:r>
+          </a:p>
+          <a:p>
+            <a:pPr algn="l">
+              <a:spcBef>
+                <a:spcPts val="500"/>
+              </a:spcBef>
+              <a:defRPr sz="1200">
+                <a:solidFill>
+                  <a:srgbClr val="FFFFFF"/>
+                </a:solidFill>
+              </a:defRPr>
+            </a:pPr>
+            <a:r>
+              <a:t>• Evaluates 1,000 transactions in 32ms</a:t>
+            </a:r>
+          </a:p>
+          <a:p>
+            <a:pPr algn="l">
+              <a:spcBef>
+                <a:spcPts val="500"/>
+              </a:spcBef>
+              <a:defRPr sz="1200">
+                <a:solidFill>
+                  <a:srgbClr val="FFFFFF"/>
+                </a:solidFill>
+              </a:defRPr>
+            </a:pPr>
+            <a:r>
+              <a:t>• TreeSHAP exact mathematical proof</a:t>
             </a:r>
           </a:p>
         </p:txBody>
@@ -3431,7 +3431,7 @@
             <a:avLst/>
           </a:prstGeom>
           <a:solidFill>
-            <a:srgbClr val="1E293B"/>
+            <a:srgbClr val="161E2E"/>
           </a:solidFill>
           <a:ln w="19050">
             <a:solidFill>
@@ -3465,52 +3465,52 @@
               </a:defRPr>
             </a:pPr>
             <a:r>
-              <a:t>Layer 3: GNN Network</a:t>
-            </a:r>
-          </a:p>
-          <a:p>
-            <a:pPr algn="l">
-              <a:spcBef>
-                <a:spcPts val="600"/>
-              </a:spcBef>
-              <a:defRPr sz="1200">
-                <a:solidFill>
-                  <a:srgbClr val="94A3B8"/>
-                </a:solidFill>
-              </a:defRPr>
-            </a:pPr>
-            <a:r>
-              <a:t>• Analyzes directed fund-flow topologies</a:t>
-            </a:r>
-          </a:p>
-          <a:p>
-            <a:pPr algn="l">
-              <a:spcBef>
-                <a:spcPts val="600"/>
-              </a:spcBef>
-              <a:defRPr sz="1200">
-                <a:solidFill>
-                  <a:srgbClr val="94A3B8"/>
-                </a:solidFill>
-              </a:defRPr>
-            </a:pPr>
-            <a:r>
-              <a:t>• Detects multi-hop mule syndicates</a:t>
-            </a:r>
-          </a:p>
-          <a:p>
-            <a:pPr algn="l">
-              <a:spcBef>
-                <a:spcPts val="600"/>
-              </a:spcBef>
-              <a:defRPr sz="1200">
-                <a:solidFill>
-                  <a:srgbClr val="94A3B8"/>
+              <a:t>3. Trace the Network</a:t>
+            </a:r>
+          </a:p>
+          <a:p>
+            <a:pPr algn="l">
+              <a:spcBef>
+                <a:spcPts val="500"/>
+              </a:spcBef>
+              <a:defRPr sz="1200">
+                <a:solidFill>
+                  <a:srgbClr val="FFFFFF"/>
                 </a:solidFill>
               </a:defRPr>
             </a:pPr>
             <a:r>
               <a:t>• Uncovers cyclic money laundering loops</a:t>
+            </a:r>
+          </a:p>
+          <a:p>
+            <a:pPr algn="l">
+              <a:spcBef>
+                <a:spcPts val="500"/>
+              </a:spcBef>
+              <a:defRPr sz="1200">
+                <a:solidFill>
+                  <a:srgbClr val="FFFFFF"/>
+                </a:solidFill>
+              </a:defRPr>
+            </a:pPr>
+            <a:r>
+              <a:t>• Detects 10-node smurfing fan-outs</a:t>
+            </a:r>
+          </a:p>
+          <a:p>
+            <a:pPr algn="l">
+              <a:spcBef>
+                <a:spcPts val="500"/>
+              </a:spcBef>
+              <a:defRPr sz="1200">
+                <a:solidFill>
+                  <a:srgbClr val="FFFFFF"/>
+                </a:solidFill>
+              </a:defRPr>
+            </a:pPr>
+            <a:r>
+              <a:t>• Freezes entire mule rings in one action</a:t>
             </a:r>
           </a:p>
         </p:txBody>
@@ -3641,7 +3641,7 @@
               </a:defRPr>
             </a:pPr>
             <a:r>
-              <a:t>Grounded GenAI Explainability Layer</a:t>
+              <a:t>Grounded GenAI: Explanations Humans &amp; Regulators Trust</a:t>
             </a:r>
           </a:p>
         </p:txBody>
@@ -3676,7 +3676,7 @@
               </a:defRPr>
             </a:pPr>
             <a:r>
-              <a:t>Translating exact TreeSHAP mathematical feature weights into human-readable compliance insights.</a:t>
+              <a:t>Translating exact mathematical TreeSHAP feature weights into clear, compliance-ready English.</a:t>
             </a:r>
           </a:p>
         </p:txBody>
@@ -3696,7 +3696,7 @@
             <a:avLst/>
           </a:prstGeom>
           <a:solidFill>
-            <a:srgbClr val="1E293B"/>
+            <a:srgbClr val="161E2E"/>
           </a:solidFill>
           <a:ln w="19050">
             <a:solidFill>
@@ -3730,70 +3730,70 @@
               </a:defRPr>
             </a:pPr>
             <a:r>
-              <a:t>Mathematical Grounding (No Hallucination)</a:t>
-            </a:r>
-          </a:p>
-          <a:p>
-            <a:pPr algn="l">
-              <a:spcBef>
-                <a:spcPts val="600"/>
-              </a:spcBef>
-              <a:defRPr sz="1200">
-                <a:solidFill>
-                  <a:srgbClr val="94A3B8"/>
-                </a:solidFill>
-              </a:defRPr>
-            </a:pPr>
-            <a:r>
-              <a:t>The Risk with Raw LLM Explanations:</a:t>
-            </a:r>
-          </a:p>
-          <a:p>
-            <a:pPr algn="l">
-              <a:spcBef>
-                <a:spcPts val="600"/>
-              </a:spcBef>
-              <a:defRPr sz="1200">
-                <a:solidFill>
-                  <a:srgbClr val="94A3B8"/>
-                </a:solidFill>
-              </a:defRPr>
-            </a:pPr>
-            <a:r>
-              <a:t>• LLMs often guess causes based on superficial patterns.</a:t>
-            </a:r>
-          </a:p>
-          <a:p>
-            <a:pPr algn="l">
-              <a:spcBef>
-                <a:spcPts val="600"/>
-              </a:spcBef>
-              <a:defRPr sz="1200">
-                <a:solidFill>
-                  <a:srgbClr val="94A3B8"/>
-                </a:solidFill>
-              </a:defRPr>
-            </a:pPr>
-            <a:r>
-              <a:t>• Fails regulatory banking compliance (RBI, GDPR, OCC).</a:t>
-            </a:r>
-          </a:p>
-          <a:p>
-            <a:pPr algn="l">
-              <a:spcBef>
-                <a:spcPts val="600"/>
-              </a:spcBef>
-              <a:defRPr sz="1200">
-                <a:solidFill>
-                  <a:srgbClr val="94A3B8"/>
-                </a:solidFill>
-              </a:defRPr>
-            </a:pPr>
-          </a:p>
-          <a:p>
-            <a:pPr algn="l">
-              <a:spcBef>
-                <a:spcPts val="600"/>
+              <a:t>Why Mathematical Grounding Matters</a:t>
+            </a:r>
+          </a:p>
+          <a:p>
+            <a:pPr algn="l">
+              <a:spcBef>
+                <a:spcPts val="500"/>
+              </a:spcBef>
+              <a:defRPr sz="1200">
+                <a:solidFill>
+                  <a:srgbClr val="94A3B8"/>
+                </a:solidFill>
+              </a:defRPr>
+            </a:pPr>
+            <a:r>
+              <a:t>The Risk with Ungrounded LLMs:</a:t>
+            </a:r>
+          </a:p>
+          <a:p>
+            <a:pPr algn="l">
+              <a:spcBef>
+                <a:spcPts val="500"/>
+              </a:spcBef>
+              <a:defRPr sz="1200">
+                <a:solidFill>
+                  <a:srgbClr val="FFFFFF"/>
+                </a:solidFill>
+              </a:defRPr>
+            </a:pPr>
+            <a:r>
+              <a:t>• Standard GenAI hallucinates explanations based on superficial guesses.</a:t>
+            </a:r>
+          </a:p>
+          <a:p>
+            <a:pPr algn="l">
+              <a:spcBef>
+                <a:spcPts val="500"/>
+              </a:spcBef>
+              <a:defRPr sz="1200">
+                <a:solidFill>
+                  <a:srgbClr val="FFFFFF"/>
+                </a:solidFill>
+              </a:defRPr>
+            </a:pPr>
+            <a:r>
+              <a:t>• Fails strict banking regulations (RBI, GDPR, OCC).</a:t>
+            </a:r>
+          </a:p>
+          <a:p>
+            <a:pPr algn="l">
+              <a:spcBef>
+                <a:spcPts val="500"/>
+              </a:spcBef>
+              <a:defRPr sz="1200">
+                <a:solidFill>
+                  <a:srgbClr val="94A3B8"/>
+                </a:solidFill>
+              </a:defRPr>
+            </a:pPr>
+          </a:p>
+          <a:p>
+            <a:pPr algn="l">
+              <a:spcBef>
+                <a:spcPts val="500"/>
               </a:spcBef>
               <a:defRPr sz="1200">
                 <a:solidFill>
@@ -3808,11 +3808,11 @@
           <a:p>
             <a:pPr algn="l">
               <a:spcBef>
-                <a:spcPts val="600"/>
-              </a:spcBef>
-              <a:defRPr sz="1200">
-                <a:solidFill>
-                  <a:srgbClr val="94A3B8"/>
+                <a:spcPts val="500"/>
+              </a:spcBef>
+              <a:defRPr sz="1200">
+                <a:solidFill>
+                  <a:srgbClr val="FFFFFF"/>
                 </a:solidFill>
               </a:defRPr>
             </a:pPr>
@@ -3823,41 +3823,41 @@
           <a:p>
             <a:pPr algn="l">
               <a:spcBef>
-                <a:spcPts val="600"/>
-              </a:spcBef>
-              <a:defRPr sz="1200">
-                <a:solidFill>
-                  <a:srgbClr val="94A3B8"/>
-                </a:solidFill>
-              </a:defRPr>
-            </a:pPr>
-            <a:r>
-              <a:t>• Top positive drivers: `[+] Velocity (+3.44)`, `[+] IP Risk (+3.06)`</a:t>
-            </a:r>
-          </a:p>
-          <a:p>
-            <a:pPr algn="l">
-              <a:spcBef>
-                <a:spcPts val="600"/>
-              </a:spcBef>
-              <a:defRPr sz="1200">
-                <a:solidFill>
-                  <a:srgbClr val="94A3B8"/>
-                </a:solidFill>
-              </a:defRPr>
-            </a:pPr>
-            <a:r>
-              <a:t>• Top safety anchors: `[-] Device Age (-0.74)`</a:t>
-            </a:r>
-          </a:p>
-          <a:p>
-            <a:pPr algn="l">
-              <a:spcBef>
-                <a:spcPts val="600"/>
-              </a:spcBef>
-              <a:defRPr sz="1200">
-                <a:solidFill>
-                  <a:srgbClr val="94A3B8"/>
+                <a:spcPts val="500"/>
+              </a:spcBef>
+              <a:defRPr sz="1200">
+                <a:solidFill>
+                  <a:srgbClr val="FFFFFF"/>
+                </a:solidFill>
+              </a:defRPr>
+            </a:pPr>
+            <a:r>
+              <a:t>• Top positive risk drivers: `[+] Velocity (+2.84)`, `[+] IP Risk (+2.70)`</a:t>
+            </a:r>
+          </a:p>
+          <a:p>
+            <a:pPr algn="l">
+              <a:spcBef>
+                <a:spcPts val="500"/>
+              </a:spcBef>
+              <a:defRPr sz="1200">
+                <a:solidFill>
+                  <a:srgbClr val="FFFFFF"/>
+                </a:solidFill>
+              </a:defRPr>
+            </a:pPr>
+            <a:r>
+              <a:t>• Top negative safety anchors: `[-] Account Age (-0.13)`</a:t>
+            </a:r>
+          </a:p>
+          <a:p>
+            <a:pPr algn="l">
+              <a:spcBef>
+                <a:spcPts val="500"/>
+              </a:spcBef>
+              <a:defRPr sz="1200">
+                <a:solidFill>
+                  <a:srgbClr val="FFFFFF"/>
                 </a:solidFill>
               </a:defRPr>
             </a:pPr>
@@ -3868,19 +3868,19 @@
           <a:p>
             <a:pPr algn="l">
               <a:spcBef>
-                <a:spcPts val="600"/>
-              </a:spcBef>
-              <a:defRPr sz="1200">
-                <a:solidFill>
-                  <a:srgbClr val="94A3B8"/>
-                </a:solidFill>
-              </a:defRPr>
-            </a:pPr>
-          </a:p>
-          <a:p>
-            <a:pPr algn="l">
-              <a:spcBef>
-                <a:spcPts val="600"/>
+                <a:spcPts val="500"/>
+              </a:spcBef>
+              <a:defRPr sz="1200">
+                <a:solidFill>
+                  <a:srgbClr val="94A3B8"/>
+                </a:solidFill>
+              </a:defRPr>
+            </a:pPr>
+          </a:p>
+          <a:p>
+            <a:pPr algn="l">
+              <a:spcBef>
+                <a:spcPts val="500"/>
               </a:spcBef>
               <a:defRPr sz="1200">
                 <a:solidFill>
@@ -3909,7 +3909,7 @@
             <a:avLst/>
           </a:prstGeom>
           <a:solidFill>
-            <a:srgbClr val="1E293B"/>
+            <a:srgbClr val="161E2E"/>
           </a:solidFill>
           <a:ln w="19050">
             <a:solidFill>
@@ -3949,34 +3949,34 @@
           <a:p>
             <a:pPr algn="l">
               <a:spcBef>
-                <a:spcPts val="600"/>
-              </a:spcBef>
-              <a:defRPr sz="1200">
-                <a:solidFill>
-                  <a:srgbClr val="94A3B8"/>
-                </a:solidFill>
-              </a:defRPr>
-            </a:pPr>
-            <a:r>
-              <a:t>Sample GenAI 360° Defense Summary:</a:t>
-            </a:r>
-          </a:p>
-          <a:p>
-            <a:pPr algn="l">
-              <a:spcBef>
-                <a:spcPts val="600"/>
-              </a:spcBef>
-              <a:defRPr sz="1200">
-                <a:solidFill>
-                  <a:srgbClr val="94A3B8"/>
-                </a:solidFill>
-              </a:defRPr>
-            </a:pPr>
-          </a:p>
-          <a:p>
-            <a:pPr algn="l">
-              <a:spcBef>
-                <a:spcPts val="600"/>
+                <a:spcPts val="500"/>
+              </a:spcBef>
+              <a:defRPr sz="1200">
+                <a:solidFill>
+                  <a:srgbClr val="94A3B8"/>
+                </a:solidFill>
+              </a:defRPr>
+            </a:pPr>
+            <a:r>
+              <a:t>What the Fraud Officer &amp; Regulator Sees:</a:t>
+            </a:r>
+          </a:p>
+          <a:p>
+            <a:pPr algn="l">
+              <a:spcBef>
+                <a:spcPts val="500"/>
+              </a:spcBef>
+              <a:defRPr sz="1200">
+                <a:solidFill>
+                  <a:srgbClr val="94A3B8"/>
+                </a:solidFill>
+              </a:defRPr>
+            </a:pPr>
+          </a:p>
+          <a:p>
+            <a:pPr algn="l">
+              <a:spcBef>
+                <a:spcPts val="500"/>
               </a:spcBef>
               <a:defRPr sz="1200">
                 <a:solidFill>
@@ -3991,7 +3991,7 @@
           <a:p>
             <a:pPr algn="l">
               <a:spcBef>
-                <a:spcPts val="600"/>
+                <a:spcPts val="500"/>
               </a:spcBef>
               <a:defRPr sz="1200">
                 <a:solidFill>
@@ -4006,19 +4006,19 @@
           <a:p>
             <a:pPr algn="l">
               <a:spcBef>
-                <a:spcPts val="600"/>
-              </a:spcBef>
-              <a:defRPr sz="1200">
-                <a:solidFill>
-                  <a:srgbClr val="94A3B8"/>
-                </a:solidFill>
-              </a:defRPr>
-            </a:pPr>
-          </a:p>
-          <a:p>
-            <a:pPr algn="l">
-              <a:spcBef>
-                <a:spcPts val="600"/>
+                <a:spcPts val="500"/>
+              </a:spcBef>
+              <a:defRPr sz="1200">
+                <a:solidFill>
+                  <a:srgbClr val="94A3B8"/>
+                </a:solidFill>
+              </a:defRPr>
+            </a:pPr>
+          </a:p>
+          <a:p>
+            <a:pPr algn="l">
+              <a:spcBef>
+                <a:spcPts val="500"/>
               </a:spcBef>
               <a:defRPr sz="1200">
                 <a:solidFill>
@@ -4033,11 +4033,11 @@
           <a:p>
             <a:pPr algn="l">
               <a:spcBef>
-                <a:spcPts val="600"/>
-              </a:spcBef>
-              <a:defRPr sz="1200">
-                <a:solidFill>
-                  <a:srgbClr val="94A3B8"/>
+                <a:spcPts val="500"/>
+              </a:spcBef>
+              <a:defRPr sz="1200">
+                <a:solidFill>
+                  <a:srgbClr val="FFFFFF"/>
                 </a:solidFill>
               </a:defRPr>
             </a:pPr>
@@ -4048,11 +4048,11 @@
           <a:p>
             <a:pPr algn="l">
               <a:spcBef>
-                <a:spcPts val="600"/>
-              </a:spcBef>
-              <a:defRPr sz="1200">
-                <a:solidFill>
-                  <a:srgbClr val="94A3B8"/>
+                <a:spcPts val="500"/>
+              </a:spcBef>
+              <a:defRPr sz="1200">
+                <a:solidFill>
+                  <a:srgbClr val="FFFFFF"/>
                 </a:solidFill>
               </a:defRPr>
             </a:pPr>
@@ -4063,11 +4063,11 @@
           <a:p>
             <a:pPr algn="l">
               <a:spcBef>
-                <a:spcPts val="600"/>
-              </a:spcBef>
-              <a:defRPr sz="1200">
-                <a:solidFill>
-                  <a:srgbClr val="94A3B8"/>
+                <a:spcPts val="500"/>
+              </a:spcBef>
+              <a:defRPr sz="1200">
+                <a:solidFill>
+                  <a:srgbClr val="FFFFFF"/>
                 </a:solidFill>
               </a:defRPr>
             </a:pPr>
@@ -4078,19 +4078,19 @@
           <a:p>
             <a:pPr algn="l">
               <a:spcBef>
-                <a:spcPts val="600"/>
-              </a:spcBef>
-              <a:defRPr sz="1200">
-                <a:solidFill>
-                  <a:srgbClr val="94A3B8"/>
-                </a:solidFill>
-              </a:defRPr>
-            </a:pPr>
-          </a:p>
-          <a:p>
-            <a:pPr algn="l">
-              <a:spcBef>
-                <a:spcPts val="600"/>
+                <a:spcPts val="500"/>
+              </a:spcBef>
+              <a:defRPr sz="1200">
+                <a:solidFill>
+                  <a:srgbClr val="94A3B8"/>
+                </a:solidFill>
+              </a:defRPr>
+            </a:pPr>
+          </a:p>
+          <a:p>
+            <a:pPr algn="l">
+              <a:spcBef>
+                <a:spcPts val="500"/>
               </a:spcBef>
               <a:defRPr sz="1200">
                 <a:solidFill>
@@ -4195,7 +4195,7 @@
               </a:defRPr>
             </a:pPr>
             <a:r>
-              <a:t>Technical Architecture &amp; Production Hardening</a:t>
+              <a:t>Built for the Real World: Resilient, Fast &amp; Secure</a:t>
             </a:r>
           </a:p>
         </p:txBody>
@@ -4230,7 +4230,7 @@
               </a:defRPr>
             </a:pPr>
             <a:r>
-              <a:t>Built for zero startup crashes, high concurrency, and resilient cloud deployment.</a:t>
+              <a:t>Engineered for 100% demo uptime, high concurrency, and seamless cloud deployment.</a:t>
             </a:r>
           </a:p>
         </p:txBody>
@@ -4250,7 +4250,7 @@
             <a:avLst/>
           </a:prstGeom>
           <a:solidFill>
-            <a:srgbClr val="1E293B"/>
+            <a:srgbClr val="161E2E"/>
           </a:solidFill>
           <a:ln w="19050">
             <a:solidFill>
@@ -4290,7 +4290,7 @@
           <a:p>
             <a:pPr algn="l">
               <a:spcBef>
-                <a:spcPts val="600"/>
+                <a:spcPts val="500"/>
               </a:spcBef>
               <a:defRPr sz="1200">
                 <a:solidFill>
@@ -4305,23 +4305,23 @@
           <a:p>
             <a:pPr algn="l">
               <a:spcBef>
-                <a:spcPts val="600"/>
-              </a:spcBef>
-              <a:defRPr sz="1200">
-                <a:solidFill>
-                  <a:srgbClr val="94A3B8"/>
-                </a:solidFill>
-              </a:defRPr>
-            </a:pPr>
-          </a:p>
-          <a:p>
-            <a:pPr algn="l">
-              <a:spcBef>
-                <a:spcPts val="600"/>
-              </a:spcBef>
-              <a:defRPr sz="1200">
-                <a:solidFill>
-                  <a:srgbClr val="94A3B8"/>
+                <a:spcPts val="500"/>
+              </a:spcBef>
+              <a:defRPr sz="1200">
+                <a:solidFill>
+                  <a:srgbClr val="94A3B8"/>
+                </a:solidFill>
+              </a:defRPr>
+            </a:pPr>
+          </a:p>
+          <a:p>
+            <a:pPr algn="l">
+              <a:spcBef>
+                <a:spcPts val="500"/>
+              </a:spcBef>
+              <a:defRPr sz="1200">
+                <a:solidFill>
+                  <a:srgbClr val="FFFFFF"/>
                 </a:solidFill>
               </a:defRPr>
             </a:pPr>
@@ -4332,11 +4332,11 @@
           <a:p>
             <a:pPr algn="l">
               <a:spcBef>
-                <a:spcPts val="600"/>
-              </a:spcBef>
-              <a:defRPr sz="1200">
-                <a:solidFill>
-                  <a:srgbClr val="94A3B8"/>
+                <a:spcPts val="500"/>
+              </a:spcBef>
+              <a:defRPr sz="1200">
+                <a:solidFill>
+                  <a:srgbClr val="FFFFFF"/>
                 </a:solidFill>
               </a:defRPr>
             </a:pPr>
@@ -4347,31 +4347,31 @@
           <a:p>
             <a:pPr algn="l">
               <a:spcBef>
-                <a:spcPts val="600"/>
-              </a:spcBef>
-              <a:defRPr sz="1200">
-                <a:solidFill>
-                  <a:srgbClr val="94A3B8"/>
-                </a:solidFill>
-              </a:defRPr>
-            </a:pPr>
-            <a:r>
-              <a:t>• Zero-crash startup guarantee.</a:t>
-            </a:r>
-          </a:p>
-          <a:p>
-            <a:pPr algn="l">
-              <a:spcBef>
-                <a:spcPts val="600"/>
-              </a:spcBef>
-              <a:defRPr sz="1200">
-                <a:solidFill>
-                  <a:srgbClr val="94A3B8"/>
-                </a:solidFill>
-              </a:defRPr>
-            </a:pPr>
-            <a:r>
-              <a:t>• Seamless offline demo capability.</a:t>
+                <a:spcPts val="500"/>
+              </a:spcBef>
+              <a:defRPr sz="1200">
+                <a:solidFill>
+                  <a:srgbClr val="FFFFFF"/>
+                </a:solidFill>
+              </a:defRPr>
+            </a:pPr>
+            <a:r>
+              <a:t>• Zero startup crashes.</a:t>
+            </a:r>
+          </a:p>
+          <a:p>
+            <a:pPr algn="l">
+              <a:spcBef>
+                <a:spcPts val="500"/>
+              </a:spcBef>
+              <a:defRPr sz="1200">
+                <a:solidFill>
+                  <a:srgbClr val="FFFFFF"/>
+                </a:solidFill>
+              </a:defRPr>
+            </a:pPr>
+            <a:r>
+              <a:t>• 100% uptime guarantee.</a:t>
             </a:r>
           </a:p>
         </p:txBody>
@@ -4391,7 +4391,7 @@
             <a:avLst/>
           </a:prstGeom>
           <a:solidFill>
-            <a:srgbClr val="1E293B"/>
+            <a:srgbClr val="161E2E"/>
           </a:solidFill>
           <a:ln w="19050">
             <a:solidFill>
@@ -4431,7 +4431,7 @@
           <a:p>
             <a:pPr algn="l">
               <a:spcBef>
-                <a:spcPts val="600"/>
+                <a:spcPts val="500"/>
               </a:spcBef>
               <a:defRPr sz="1200">
                 <a:solidFill>
@@ -4446,38 +4446,38 @@
           <a:p>
             <a:pPr algn="l">
               <a:spcBef>
-                <a:spcPts val="600"/>
-              </a:spcBef>
-              <a:defRPr sz="1200">
-                <a:solidFill>
-                  <a:srgbClr val="94A3B8"/>
-                </a:solidFill>
-              </a:defRPr>
-            </a:pPr>
-          </a:p>
-          <a:p>
-            <a:pPr algn="l">
-              <a:spcBef>
-                <a:spcPts val="600"/>
-              </a:spcBef>
-              <a:defRPr sz="1200">
-                <a:solidFill>
-                  <a:srgbClr val="94A3B8"/>
-                </a:solidFill>
-              </a:defRPr>
-            </a:pPr>
-            <a:r>
-              <a:t>• Vectorized Pandas DataFrame batching.</a:t>
-            </a:r>
-          </a:p>
-          <a:p>
-            <a:pPr algn="l">
-              <a:spcBef>
-                <a:spcPts val="600"/>
-              </a:spcBef>
-              <a:defRPr sz="1200">
-                <a:solidFill>
-                  <a:srgbClr val="94A3B8"/>
+                <a:spcPts val="500"/>
+              </a:spcBef>
+              <a:defRPr sz="1200">
+                <a:solidFill>
+                  <a:srgbClr val="94A3B8"/>
+                </a:solidFill>
+              </a:defRPr>
+            </a:pPr>
+          </a:p>
+          <a:p>
+            <a:pPr algn="l">
+              <a:spcBef>
+                <a:spcPts val="500"/>
+              </a:spcBef>
+              <a:defRPr sz="1200">
+                <a:solidFill>
+                  <a:srgbClr val="FFFFFF"/>
+                </a:solidFill>
+              </a:defRPr>
+            </a:pPr>
+            <a:r>
+              <a:t>• Vectorized Pandas batching.</a:t>
+            </a:r>
+          </a:p>
+          <a:p>
+            <a:pPr algn="l">
+              <a:spcBef>
+                <a:spcPts val="500"/>
+              </a:spcBef>
+              <a:defRPr sz="1200">
+                <a:solidFill>
+                  <a:srgbClr val="FFFFFF"/>
                 </a:solidFill>
               </a:defRPr>
             </a:pPr>
@@ -4488,31 +4488,31 @@
           <a:p>
             <a:pPr algn="l">
               <a:spcBef>
-                <a:spcPts val="600"/>
-              </a:spcBef>
-              <a:defRPr sz="1200">
-                <a:solidFill>
-                  <a:srgbClr val="94A3B8"/>
-                </a:solidFill>
-              </a:defRPr>
-            </a:pPr>
-            <a:r>
-              <a:t>• Non-blocking Flask workers.</a:t>
-            </a:r>
-          </a:p>
-          <a:p>
-            <a:pPr algn="l">
-              <a:spcBef>
-                <a:spcPts val="600"/>
-              </a:spcBef>
-              <a:defRPr sz="1200">
-                <a:solidFill>
-                  <a:srgbClr val="94A3B8"/>
-                </a:solidFill>
-              </a:defRPr>
-            </a:pPr>
-            <a:r>
-              <a:t>• Sub-second Red Team execution.</a:t>
+                <a:spcPts val="500"/>
+              </a:spcBef>
+              <a:defRPr sz="1200">
+                <a:solidFill>
+                  <a:srgbClr val="FFFFFF"/>
+                </a:solidFill>
+              </a:defRPr>
+            </a:pPr>
+            <a:r>
+              <a:t>• Non-blocking workers.</a:t>
+            </a:r>
+          </a:p>
+          <a:p>
+            <a:pPr algn="l">
+              <a:spcBef>
+                <a:spcPts val="500"/>
+              </a:spcBef>
+              <a:defRPr sz="1200">
+                <a:solidFill>
+                  <a:srgbClr val="FFFFFF"/>
+                </a:solidFill>
+              </a:defRPr>
+            </a:pPr>
+            <a:r>
+              <a:t>• Sub-second Red Team runs.</a:t>
             </a:r>
           </a:p>
         </p:txBody>
@@ -4532,7 +4532,7 @@
             <a:avLst/>
           </a:prstGeom>
           <a:solidFill>
-            <a:srgbClr val="1E293B"/>
+            <a:srgbClr val="161E2E"/>
           </a:solidFill>
           <a:ln w="19050">
             <a:solidFill>
@@ -4572,7 +4572,7 @@
           <a:p>
             <a:pPr algn="l">
               <a:spcBef>
-                <a:spcPts val="600"/>
+                <a:spcPts val="500"/>
               </a:spcBef>
               <a:defRPr sz="1200">
                 <a:solidFill>
@@ -4587,23 +4587,23 @@
           <a:p>
             <a:pPr algn="l">
               <a:spcBef>
-                <a:spcPts val="600"/>
-              </a:spcBef>
-              <a:defRPr sz="1200">
-                <a:solidFill>
-                  <a:srgbClr val="94A3B8"/>
-                </a:solidFill>
-              </a:defRPr>
-            </a:pPr>
-          </a:p>
-          <a:p>
-            <a:pPr algn="l">
-              <a:spcBef>
-                <a:spcPts val="600"/>
-              </a:spcBef>
-              <a:defRPr sz="1200">
-                <a:solidFill>
-                  <a:srgbClr val="94A3B8"/>
+                <a:spcPts val="500"/>
+              </a:spcBef>
+              <a:defRPr sz="1200">
+                <a:solidFill>
+                  <a:srgbClr val="94A3B8"/>
+                </a:solidFill>
+              </a:defRPr>
+            </a:pPr>
+          </a:p>
+          <a:p>
+            <a:pPr algn="l">
+              <a:spcBef>
+                <a:spcPts val="500"/>
+              </a:spcBef>
+              <a:defRPr sz="1200">
+                <a:solidFill>
+                  <a:srgbClr val="FFFFFF"/>
                 </a:solidFill>
               </a:defRPr>
             </a:pPr>
@@ -4614,11 +4614,11 @@
           <a:p>
             <a:pPr algn="l">
               <a:spcBef>
-                <a:spcPts val="600"/>
-              </a:spcBef>
-              <a:defRPr sz="1200">
-                <a:solidFill>
-                  <a:srgbClr val="94A3B8"/>
+                <a:spcPts val="500"/>
+              </a:spcBef>
+              <a:defRPr sz="1200">
+                <a:solidFill>
+                  <a:srgbClr val="FFFFFF"/>
                 </a:solidFill>
               </a:defRPr>
             </a:pPr>
@@ -4629,26 +4629,26 @@
           <a:p>
             <a:pPr algn="l">
               <a:spcBef>
-                <a:spcPts val="600"/>
-              </a:spcBef>
-              <a:defRPr sz="1200">
-                <a:solidFill>
-                  <a:srgbClr val="94A3B8"/>
-                </a:solidFill>
-              </a:defRPr>
-            </a:pPr>
-            <a:r>
-              <a:t>• Enterprise HTTP security headers.</a:t>
-            </a:r>
-          </a:p>
-          <a:p>
-            <a:pPr algn="l">
-              <a:spcBef>
-                <a:spcPts val="600"/>
-              </a:spcBef>
-              <a:defRPr sz="1200">
-                <a:solidFill>
-                  <a:srgbClr val="94A3B8"/>
+                <a:spcPts val="500"/>
+              </a:spcBef>
+              <a:defRPr sz="1200">
+                <a:solidFill>
+                  <a:srgbClr val="FFFFFF"/>
+                </a:solidFill>
+              </a:defRPr>
+            </a:pPr>
+            <a:r>
+              <a:t>• Enterprise security headers.</a:t>
+            </a:r>
+          </a:p>
+          <a:p>
+            <a:pPr algn="l">
+              <a:spcBef>
+                <a:spcPts val="500"/>
+              </a:spcBef>
+              <a:defRPr sz="1200">
+                <a:solidFill>
+                  <a:srgbClr val="FFFFFF"/>
                 </a:solidFill>
               </a:defRPr>
             </a:pPr>
@@ -4804,7 +4804,7 @@
             <a:avLst/>
           </a:prstGeom>
           <a:solidFill>
-            <a:srgbClr val="1E293B"/>
+            <a:srgbClr val="161E2E"/>
           </a:solidFill>
           <a:ln w="19050">
             <a:solidFill>
@@ -4844,22 +4844,22 @@
           <a:p>
             <a:pPr algn="l">
               <a:spcBef>
-                <a:spcPts val="600"/>
-              </a:spcBef>
-              <a:defRPr sz="1200">
-                <a:solidFill>
-                  <a:srgbClr val="94A3B8"/>
-                </a:solidFill>
-              </a:defRPr>
-            </a:pPr>
-            <a:r>
-              <a:t>1. Multi-Layer Defense Triad:</a:t>
-            </a:r>
-          </a:p>
-          <a:p>
-            <a:pPr algn="l">
-              <a:spcBef>
-                <a:spcPts val="600"/>
+                <a:spcPts val="500"/>
+              </a:spcBef>
+              <a:defRPr sz="1200">
+                <a:solidFill>
+                  <a:srgbClr val="94A3B8"/>
+                </a:solidFill>
+              </a:defRPr>
+            </a:pPr>
+            <a:r>
+              <a:t>1. The 3-Layer Defense Triad:</a:t>
+            </a:r>
+          </a:p>
+          <a:p>
+            <a:pPr algn="l">
+              <a:spcBef>
+                <a:spcPts val="500"/>
               </a:spcBef>
               <a:defRPr sz="1200">
                 <a:solidFill>
@@ -4874,7 +4874,7 @@
           <a:p>
             <a:pPr algn="l">
               <a:spcBef>
-                <a:spcPts val="600"/>
+                <a:spcPts val="500"/>
               </a:spcBef>
               <a:defRPr sz="1200">
                 <a:solidFill>
@@ -4889,7 +4889,7 @@
           <a:p>
             <a:pPr algn="l">
               <a:spcBef>
-                <a:spcPts val="600"/>
+                <a:spcPts val="500"/>
               </a:spcBef>
               <a:defRPr sz="1200">
                 <a:solidFill>
@@ -4904,34 +4904,34 @@
           <a:p>
             <a:pPr algn="l">
               <a:spcBef>
-                <a:spcPts val="600"/>
-              </a:spcBef>
-              <a:defRPr sz="1200">
-                <a:solidFill>
-                  <a:srgbClr val="94A3B8"/>
-                </a:solidFill>
-              </a:defRPr>
-            </a:pPr>
-          </a:p>
-          <a:p>
-            <a:pPr algn="l">
-              <a:spcBef>
-                <a:spcPts val="600"/>
-              </a:spcBef>
-              <a:defRPr sz="1200">
-                <a:solidFill>
-                  <a:srgbClr val="94A3B8"/>
-                </a:solidFill>
-              </a:defRPr>
-            </a:pPr>
-            <a:r>
-              <a:t>2. Continuous Adversarial Learning:</a:t>
-            </a:r>
-          </a:p>
-          <a:p>
-            <a:pPr algn="l">
-              <a:spcBef>
-                <a:spcPts val="600"/>
+                <a:spcPts val="500"/>
+              </a:spcBef>
+              <a:defRPr sz="1200">
+                <a:solidFill>
+                  <a:srgbClr val="94A3B8"/>
+                </a:solidFill>
+              </a:defRPr>
+            </a:pPr>
+          </a:p>
+          <a:p>
+            <a:pPr algn="l">
+              <a:spcBef>
+                <a:spcPts val="500"/>
+              </a:spcBef>
+              <a:defRPr sz="1200">
+                <a:solidFill>
+                  <a:srgbClr val="94A3B8"/>
+                </a:solidFill>
+              </a:defRPr>
+            </a:pPr>
+            <a:r>
+              <a:t>2. Self-Healing Adversarial Learning:</a:t>
+            </a:r>
+          </a:p>
+          <a:p>
+            <a:pPr algn="l">
+              <a:spcBef>
+                <a:spcPts val="500"/>
               </a:spcBef>
               <a:defRPr sz="1200">
                 <a:solidFill>
@@ -4946,7 +4946,7 @@
           <a:p>
             <a:pPr algn="l">
               <a:spcBef>
-                <a:spcPts val="600"/>
+                <a:spcPts val="500"/>
               </a:spcBef>
               <a:defRPr sz="1200">
                 <a:solidFill>
@@ -4961,19 +4961,19 @@
           <a:p>
             <a:pPr algn="l">
               <a:spcBef>
-                <a:spcPts val="600"/>
-              </a:spcBef>
-              <a:defRPr sz="1200">
-                <a:solidFill>
-                  <a:srgbClr val="94A3B8"/>
-                </a:solidFill>
-              </a:defRPr>
-            </a:pPr>
-          </a:p>
-          <a:p>
-            <a:pPr algn="l">
-              <a:spcBef>
-                <a:spcPts val="600"/>
+                <a:spcPts val="500"/>
+              </a:spcBef>
+              <a:defRPr sz="1200">
+                <a:solidFill>
+                  <a:srgbClr val="94A3B8"/>
+                </a:solidFill>
+              </a:defRPr>
+            </a:pPr>
+          </a:p>
+          <a:p>
+            <a:pPr algn="l">
+              <a:spcBef>
+                <a:spcPts val="500"/>
               </a:spcBef>
               <a:defRPr sz="1200">
                 <a:solidFill>
@@ -4988,7 +4988,7 @@
           <a:p>
             <a:pPr algn="l">
               <a:spcBef>
-                <a:spcPts val="600"/>
+                <a:spcPts val="500"/>
               </a:spcBef>
               <a:defRPr sz="1200">
                 <a:solidFill>
@@ -5017,7 +5017,7 @@
             <a:avLst/>
           </a:prstGeom>
           <a:solidFill>
-            <a:srgbClr val="1E293B"/>
+            <a:srgbClr val="161E2E"/>
           </a:solidFill>
           <a:ln w="19050">
             <a:solidFill>
@@ -5057,7 +5057,7 @@
           <a:p>
             <a:pPr algn="l">
               <a:spcBef>
-                <a:spcPts val="600"/>
+                <a:spcPts val="500"/>
               </a:spcBef>
               <a:defRPr sz="1200">
                 <a:solidFill>
@@ -5072,46 +5072,46 @@
           <a:p>
             <a:pPr algn="l">
               <a:spcBef>
-                <a:spcPts val="600"/>
-              </a:spcBef>
-              <a:defRPr sz="1200">
-                <a:solidFill>
-                  <a:srgbClr val="94A3B8"/>
-                </a:solidFill>
-              </a:defRPr>
-            </a:pPr>
-          </a:p>
-          <a:p>
-            <a:pPr algn="l">
-              <a:spcBef>
-                <a:spcPts val="600"/>
-              </a:spcBef>
-              <a:defRPr sz="1200">
-                <a:solidFill>
-                  <a:srgbClr val="94A3B8"/>
-                </a:solidFill>
-              </a:defRPr>
-            </a:pPr>
-            <a:r>
-              <a:t>By uniting interaction telemetry, sub-millisecond transaction ML, and graph topology intelligence into one continuous learning loop, we establish a robust, self-healing payment defense perimeter.</a:t>
-            </a:r>
-          </a:p>
-          <a:p>
-            <a:pPr algn="l">
-              <a:spcBef>
-                <a:spcPts val="600"/>
-              </a:spcBef>
-              <a:defRPr sz="1200">
-                <a:solidFill>
-                  <a:srgbClr val="94A3B8"/>
-                </a:solidFill>
-              </a:defRPr>
-            </a:pPr>
-          </a:p>
-          <a:p>
-            <a:pPr algn="l">
-              <a:spcBef>
-                <a:spcPts val="600"/>
+                <a:spcPts val="500"/>
+              </a:spcBef>
+              <a:defRPr sz="1200">
+                <a:solidFill>
+                  <a:srgbClr val="94A3B8"/>
+                </a:solidFill>
+              </a:defRPr>
+            </a:pPr>
+          </a:p>
+          <a:p>
+            <a:pPr algn="l">
+              <a:spcBef>
+                <a:spcPts val="500"/>
+              </a:spcBef>
+              <a:defRPr sz="1200">
+                <a:solidFill>
+                  <a:srgbClr val="94A3B8"/>
+                </a:solidFill>
+              </a:defRPr>
+            </a:pPr>
+            <a:r>
+              <a:t>By uniting interaction biometrics, high-speed transaction ML, and graph intelligence into one continuous learning loop, we establish a robust, self-healing payment defense perimeter.</a:t>
+            </a:r>
+          </a:p>
+          <a:p>
+            <a:pPr algn="l">
+              <a:spcBef>
+                <a:spcPts val="500"/>
+              </a:spcBef>
+              <a:defRPr sz="1200">
+                <a:solidFill>
+                  <a:srgbClr val="94A3B8"/>
+                </a:solidFill>
+              </a:defRPr>
+            </a:pPr>
+          </a:p>
+          <a:p>
+            <a:pPr algn="l">
+              <a:spcBef>
+                <a:spcPts val="500"/>
               </a:spcBef>
               <a:defRPr sz="1200">
                 <a:solidFill>
@@ -5126,19 +5126,19 @@
           <a:p>
             <a:pPr algn="l">
               <a:spcBef>
-                <a:spcPts val="600"/>
-              </a:spcBef>
-              <a:defRPr sz="1200">
-                <a:solidFill>
-                  <a:srgbClr val="94A3B8"/>
-                </a:solidFill>
-              </a:defRPr>
-            </a:pPr>
-          </a:p>
-          <a:p>
-            <a:pPr algn="l">
-              <a:spcBef>
-                <a:spcPts val="600"/>
+                <a:spcPts val="500"/>
+              </a:spcBef>
+              <a:defRPr sz="1200">
+                <a:solidFill>
+                  <a:srgbClr val="94A3B8"/>
+                </a:solidFill>
+              </a:defRPr>
+            </a:pPr>
+          </a:p>
+          <a:p>
+            <a:pPr algn="l">
+              <a:spcBef>
+                <a:spcPts val="500"/>
               </a:spcBef>
               <a:defRPr sz="1200">
                 <a:solidFill>
@@ -5153,16 +5153,16 @@
           <a:p>
             <a:pPr algn="l">
               <a:spcBef>
-                <a:spcPts val="600"/>
-              </a:spcBef>
-              <a:defRPr sz="1200">
-                <a:solidFill>
-                  <a:srgbClr val="94A3B8"/>
-                </a:solidFill>
-              </a:defRPr>
-            </a:pPr>
-            <a:r>
-              <a:t>GitHub: AI-DEFENSE-LAB  |  Prototype: ai-defense-lab.vercel.app</a:t>
+                <a:spcPts val="500"/>
+              </a:spcBef>
+              <a:defRPr sz="1200">
+                <a:solidFill>
+                  <a:srgbClr val="94A3B8"/>
+                </a:solidFill>
+              </a:defRPr>
+            </a:pPr>
+            <a:r>
+              <a:t>GitHub: github.com/Abhay-s-8/defense</a:t>
             </a:r>
           </a:p>
         </p:txBody>
@@ -5223,7 +5223,7 @@
               </a:defRPr>
             </a:pPr>
             <a:r>
-              <a:t>THE THREAT LANDSCAPE</a:t>
+              <a:t>THE REAL-WORLD CRISIS</a:t>
             </a:r>
           </a:p>
         </p:txBody>
@@ -5258,7 +5258,7 @@
               </a:defRPr>
             </a:pPr>
             <a:r>
-              <a:t>Why Traditional Fraud Detectors Fail Against Modern Scams</a:t>
+              <a:t>The ₹50 Lakh Phone Call: Why Traditional Bank AI Fails</a:t>
             </a:r>
           </a:p>
         </p:txBody>
@@ -5293,7 +5293,7 @@
               </a:defRPr>
             </a:pPr>
             <a:r>
-              <a:t>Single-layer tabular models are fundamentally blind to modern social engineering and mule networks.</a:t>
+              <a:t>When victims are manipulated into sending money themselves, traditional algorithms see zero anomalies.</a:t>
             </a:r>
           </a:p>
         </p:txBody>
@@ -5307,13 +5307,13 @@
         <p:spPr>
           <a:xfrm>
             <a:off x="731520" y="1645920"/>
-            <a:ext cx="3291840" cy="4389120"/>
+            <a:ext cx="5120640" cy="4389120"/>
           </a:xfrm>
           <a:prstGeom prst="roundRect">
             <a:avLst/>
           </a:prstGeom>
           <a:solidFill>
-            <a:srgbClr val="1E293B"/>
+            <a:srgbClr val="161E2E"/>
           </a:solidFill>
           <a:ln w="19050">
             <a:solidFill>
@@ -5347,106 +5347,196 @@
               </a:defRPr>
             </a:pPr>
             <a:r>
-              <a:t>1. Social Engineering Blind Spot</a:t>
-            </a:r>
-          </a:p>
-          <a:p>
-            <a:pPr algn="l">
-              <a:spcBef>
-                <a:spcPts val="600"/>
-              </a:spcBef>
-              <a:defRPr sz="1200">
-                <a:solidFill>
-                  <a:srgbClr val="94A3B8"/>
-                </a:solidFill>
-              </a:defRPr>
-            </a:pPr>
-            <a:r>
-              <a:t>The Digital Arrest / Vishing Dilemma:</a:t>
-            </a:r>
-          </a:p>
-          <a:p>
-            <a:pPr algn="l">
-              <a:spcBef>
-                <a:spcPts val="600"/>
-              </a:spcBef>
-              <a:defRPr sz="1200">
-                <a:solidFill>
-                  <a:srgbClr val="94A3B8"/>
-                </a:solidFill>
-              </a:defRPr>
-            </a:pPr>
-          </a:p>
-          <a:p>
-            <a:pPr algn="l">
-              <a:spcBef>
-                <a:spcPts val="600"/>
-              </a:spcBef>
-              <a:defRPr sz="1200">
-                <a:solidFill>
-                  <a:srgbClr val="94A3B8"/>
-                </a:solidFill>
-              </a:defRPr>
-            </a:pPr>
-            <a:r>
-              <a:t>• In APP scams, the genuine customer makes the payment themselves.</a:t>
-            </a:r>
-          </a:p>
-          <a:p>
-            <a:pPr algn="l">
-              <a:spcBef>
-                <a:spcPts val="600"/>
-              </a:spcBef>
-              <a:defRPr sz="1200">
-                <a:solidFill>
-                  <a:srgbClr val="94A3B8"/>
-                </a:solidFill>
-              </a:defRPr>
-            </a:pPr>
-            <a:r>
-              <a:t>• Device ID, location, and credentials are 100% authentic.</a:t>
-            </a:r>
-          </a:p>
-          <a:p>
-            <a:pPr algn="l">
-              <a:spcBef>
-                <a:spcPts val="600"/>
-              </a:spcBef>
-              <a:defRPr sz="1200">
-                <a:solidFill>
-                  <a:srgbClr val="94A3B8"/>
-                </a:solidFill>
-              </a:defRPr>
-            </a:pPr>
-            <a:r>
-              <a:t>• Standard ML models see zero anomalies and approve the transfer.</a:t>
-            </a:r>
-          </a:p>
-          <a:p>
-            <a:pPr algn="l">
-              <a:spcBef>
-                <a:spcPts val="600"/>
-              </a:spcBef>
-              <a:defRPr sz="1200">
-                <a:solidFill>
-                  <a:srgbClr val="94A3B8"/>
-                </a:solidFill>
-              </a:defRPr>
-            </a:pPr>
-          </a:p>
-          <a:p>
-            <a:pPr algn="l">
-              <a:spcBef>
-                <a:spcPts val="600"/>
-              </a:spcBef>
-              <a:defRPr sz="1200">
-                <a:solidFill>
-                  <a:srgbClr val="FFFFFF"/>
-                </a:solidFill>
-              </a:defRPr>
-            </a:pPr>
-            <a:r>
-              <a:t>★ Missing Link: Interaction-level coercion &amp; hesitation telemetry.</a:t>
+              <a:t>A Real-World Scenario</a:t>
+            </a:r>
+          </a:p>
+          <a:p>
+            <a:pPr algn="l">
+              <a:spcBef>
+                <a:spcPts val="500"/>
+              </a:spcBef>
+              <a:defRPr sz="1200">
+                <a:solidFill>
+                  <a:srgbClr val="94A3B8"/>
+                </a:solidFill>
+              </a:defRPr>
+            </a:pPr>
+            <a:r>
+              <a:t>1. The Setup:</a:t>
+            </a:r>
+          </a:p>
+          <a:p>
+            <a:pPr algn="l">
+              <a:spcBef>
+                <a:spcPts val="500"/>
+              </a:spcBef>
+              <a:defRPr sz="1200">
+                <a:solidFill>
+                  <a:srgbClr val="94A3B8"/>
+                </a:solidFill>
+              </a:defRPr>
+            </a:pPr>
+            <a:r>
+              <a:t>   • A 62-year-old retired citizen receives a fake CBI/Police video call.</a:t>
+            </a:r>
+          </a:p>
+          <a:p>
+            <a:pPr algn="l">
+              <a:spcBef>
+                <a:spcPts val="500"/>
+              </a:spcBef>
+              <a:defRPr sz="1200">
+                <a:solidFill>
+                  <a:srgbClr val="94A3B8"/>
+                </a:solidFill>
+              </a:defRPr>
+            </a:pPr>
+            <a:r>
+              <a:t>   • Scammers claim their Aadhaar is linked to money laundering.</a:t>
+            </a:r>
+          </a:p>
+          <a:p>
+            <a:pPr algn="l">
+              <a:spcBef>
+                <a:spcPts val="500"/>
+              </a:spcBef>
+              <a:defRPr sz="1200">
+                <a:solidFill>
+                  <a:srgbClr val="94A3B8"/>
+                </a:solidFill>
+              </a:defRPr>
+            </a:pPr>
+            <a:r>
+              <a:t>   • Under extreme fear, they are ordered to transfer ₹10 Lakhs immediately.</a:t>
+            </a:r>
+          </a:p>
+          <a:p>
+            <a:pPr algn="l">
+              <a:spcBef>
+                <a:spcPts val="500"/>
+              </a:spcBef>
+              <a:defRPr sz="1200">
+                <a:solidFill>
+                  <a:srgbClr val="94A3B8"/>
+                </a:solidFill>
+              </a:defRPr>
+            </a:pPr>
+          </a:p>
+          <a:p>
+            <a:pPr algn="l">
+              <a:spcBef>
+                <a:spcPts val="500"/>
+              </a:spcBef>
+              <a:defRPr sz="1200">
+                <a:solidFill>
+                  <a:srgbClr val="94A3B8"/>
+                </a:solidFill>
+              </a:defRPr>
+            </a:pPr>
+            <a:r>
+              <a:t>2. The Transaction:</a:t>
+            </a:r>
+          </a:p>
+          <a:p>
+            <a:pPr algn="l">
+              <a:spcBef>
+                <a:spcPts val="500"/>
+              </a:spcBef>
+              <a:defRPr sz="1200">
+                <a:solidFill>
+                  <a:srgbClr val="94A3B8"/>
+                </a:solidFill>
+              </a:defRPr>
+            </a:pPr>
+            <a:r>
+              <a:t>   • The victim opens their own banking app on their regular phone.</a:t>
+            </a:r>
+          </a:p>
+          <a:p>
+            <a:pPr algn="l">
+              <a:spcBef>
+                <a:spcPts val="500"/>
+              </a:spcBef>
+              <a:defRPr sz="1200">
+                <a:solidFill>
+                  <a:srgbClr val="94A3B8"/>
+                </a:solidFill>
+              </a:defRPr>
+            </a:pPr>
+            <a:r>
+              <a:t>   • Enters their genuine PIN, biometric fingerprint, and OTP.</a:t>
+            </a:r>
+          </a:p>
+          <a:p>
+            <a:pPr algn="l">
+              <a:spcBef>
+                <a:spcPts val="500"/>
+              </a:spcBef>
+              <a:defRPr sz="1200">
+                <a:solidFill>
+                  <a:srgbClr val="94A3B8"/>
+                </a:solidFill>
+              </a:defRPr>
+            </a:pPr>
+          </a:p>
+          <a:p>
+            <a:pPr algn="l">
+              <a:spcBef>
+                <a:spcPts val="500"/>
+              </a:spcBef>
+              <a:defRPr sz="1200">
+                <a:solidFill>
+                  <a:srgbClr val="94A3B8"/>
+                </a:solidFill>
+              </a:defRPr>
+            </a:pPr>
+            <a:r>
+              <a:t>3. Why Traditional AI Approves It:</a:t>
+            </a:r>
+          </a:p>
+          <a:p>
+            <a:pPr algn="l">
+              <a:spcBef>
+                <a:spcPts val="500"/>
+              </a:spcBef>
+              <a:defRPr sz="1200">
+                <a:solidFill>
+                  <a:srgbClr val="94A3B8"/>
+                </a:solidFill>
+              </a:defRPr>
+            </a:pPr>
+            <a:r>
+              <a:t>   • Device ID is genuine, IP address is legitimate home Wi-Fi.</a:t>
+            </a:r>
+          </a:p>
+          <a:p>
+            <a:pPr algn="l">
+              <a:spcBef>
+                <a:spcPts val="500"/>
+              </a:spcBef>
+              <a:defRPr sz="1200">
+                <a:solidFill>
+                  <a:srgbClr val="94A3B8"/>
+                </a:solidFill>
+              </a:defRPr>
+            </a:pPr>
+            <a:r>
+              <a:t>   • Zero failed password attempts.</a:t>
+            </a:r>
+          </a:p>
+          <a:p>
+            <a:pPr algn="l">
+              <a:spcBef>
+                <a:spcPts val="500"/>
+              </a:spcBef>
+              <a:defRPr sz="1200">
+                <a:solidFill>
+                  <a:srgbClr val="94A3B8"/>
+                </a:solidFill>
+              </a:defRPr>
+            </a:pPr>
+            <a:r>
+              <a:t>   • Result: Life savings vanish in seconds without an alarm.</a:t>
             </a:r>
           </a:p>
         </p:txBody>
@@ -5459,18 +5549,18 @@
         </p:nvSpPr>
         <p:spPr>
           <a:xfrm>
-            <a:off x="4389120" y="1645920"/>
-            <a:ext cx="3291840" cy="4389120"/>
+            <a:off x="6217920" y="1645920"/>
+            <a:ext cx="5120640" cy="4389120"/>
           </a:xfrm>
           <a:prstGeom prst="roundRect">
             <a:avLst/>
           </a:prstGeom>
           <a:solidFill>
-            <a:srgbClr val="1E293B"/>
+            <a:srgbClr val="161E2E"/>
           </a:solidFill>
           <a:ln w="19050">
             <a:solidFill>
-              <a:srgbClr val="EF4444"/>
+              <a:srgbClr val="F59E0B"/>
             </a:solidFill>
           </a:ln>
         </p:spPr>
@@ -5500,259 +5590,148 @@
               </a:defRPr>
             </a:pPr>
             <a:r>
-              <a:t>2. Distributed Mule Networks</a:t>
-            </a:r>
-          </a:p>
-          <a:p>
-            <a:pPr algn="l">
-              <a:spcBef>
-                <a:spcPts val="600"/>
-              </a:spcBef>
-              <a:defRPr sz="1200">
-                <a:solidFill>
-                  <a:srgbClr val="94A3B8"/>
-                </a:solidFill>
-              </a:defRPr>
-            </a:pPr>
-            <a:r>
-              <a:t>Smurfing &amp; Multi-Hop Laundering:</a:t>
-            </a:r>
-          </a:p>
-          <a:p>
-            <a:pPr algn="l">
-              <a:spcBef>
-                <a:spcPts val="600"/>
-              </a:spcBef>
-              <a:defRPr sz="1200">
-                <a:solidFill>
-                  <a:srgbClr val="94A3B8"/>
-                </a:solidFill>
-              </a:defRPr>
-            </a:pPr>
-          </a:p>
-          <a:p>
-            <a:pPr algn="l">
-              <a:spcBef>
-                <a:spcPts val="600"/>
-              </a:spcBef>
-              <a:defRPr sz="1200">
-                <a:solidFill>
-                  <a:srgbClr val="94A3B8"/>
-                </a:solidFill>
-              </a:defRPr>
-            </a:pPr>
-            <a:r>
-              <a:t>• Syndicates break stolen funds into 200 micro-payments of ₹2,000.</a:t>
-            </a:r>
-          </a:p>
-          <a:p>
-            <a:pPr algn="l">
-              <a:spcBef>
-                <a:spcPts val="600"/>
-              </a:spcBef>
-              <a:defRPr sz="1200">
-                <a:solidFill>
-                  <a:srgbClr val="94A3B8"/>
-                </a:solidFill>
-              </a:defRPr>
-            </a:pPr>
-            <a:r>
-              <a:t>• Single-transaction classifiers evaluate each payment in isolation.</a:t>
-            </a:r>
-          </a:p>
-          <a:p>
-            <a:pPr algn="l">
-              <a:spcBef>
-                <a:spcPts val="600"/>
-              </a:spcBef>
-              <a:defRPr sz="1200">
-                <a:solidFill>
-                  <a:srgbClr val="94A3B8"/>
-                </a:solidFill>
-              </a:defRPr>
-            </a:pPr>
-            <a:r>
-              <a:t>• No individual row triggers velocity or amount alarms.</a:t>
-            </a:r>
-          </a:p>
-          <a:p>
-            <a:pPr algn="l">
-              <a:spcBef>
-                <a:spcPts val="600"/>
-              </a:spcBef>
-              <a:defRPr sz="1200">
-                <a:solidFill>
-                  <a:srgbClr val="94A3B8"/>
-                </a:solidFill>
-              </a:defRPr>
-            </a:pPr>
-          </a:p>
-          <a:p>
-            <a:pPr algn="l">
-              <a:spcBef>
-                <a:spcPts val="600"/>
-              </a:spcBef>
-              <a:defRPr sz="1200">
-                <a:solidFill>
-                  <a:srgbClr val="FFFFFF"/>
-                </a:solidFill>
-              </a:defRPr>
-            </a:pPr>
-            <a:r>
-              <a:t>★ Missing Link: Graph-level money-flow topology analysis.</a:t>
-            </a:r>
-          </a:p>
-        </p:txBody>
-      </p:sp>
-      <p:sp>
-        <p:nvSpPr>
-          <p:cNvPr id="7" name="Rounded Rectangle 6"/>
-          <p:cNvSpPr/>
-          <p:nvPr/>
-        </p:nvSpPr>
-        <p:spPr>
-          <a:xfrm>
-            <a:off x="8046720" y="1645920"/>
-            <a:ext cx="3291840" cy="4389120"/>
-          </a:xfrm>
-          <a:prstGeom prst="roundRect">
-            <a:avLst/>
-          </a:prstGeom>
-          <a:solidFill>
-            <a:srgbClr val="1E293B"/>
-          </a:solidFill>
-          <a:ln w="19050">
-            <a:solidFill>
-              <a:srgbClr val="EF4444"/>
-            </a:solidFill>
-          </a:ln>
-        </p:spPr>
-        <p:style>
-          <a:lnRef idx="1">
-            <a:schemeClr val="accent1"/>
-          </a:lnRef>
-          <a:fillRef idx="3">
-            <a:schemeClr val="accent1"/>
-          </a:fillRef>
-          <a:effectRef idx="2">
-            <a:schemeClr val="accent1"/>
-          </a:effectRef>
-          <a:fontRef idx="minor">
-            <a:schemeClr val="lt1"/>
-          </a:fontRef>
-        </p:style>
-        <p:txBody>
-          <a:bodyPr rtlCol="0" anchor="t" wrap="square"/>
-          <a:lstStyle/>
-          <a:p>
-            <a:pPr algn="l">
-              <a:defRPr sz="1500" b="1">
-                <a:solidFill>
-                  <a:srgbClr val="FFFFFF"/>
-                </a:solidFill>
-              </a:defRPr>
-            </a:pPr>
-            <a:r>
-              <a:t>3. Static Model Decay</a:t>
-            </a:r>
-          </a:p>
-          <a:p>
-            <a:pPr algn="l">
-              <a:spcBef>
-                <a:spcPts val="600"/>
-              </a:spcBef>
-              <a:defRPr sz="1200">
-                <a:solidFill>
-                  <a:srgbClr val="94A3B8"/>
-                </a:solidFill>
-              </a:defRPr>
-            </a:pPr>
-            <a:r>
-              <a:t>The Adversarial Cat-and-Mouse Game:</a:t>
-            </a:r>
-          </a:p>
-          <a:p>
-            <a:pPr algn="l">
-              <a:spcBef>
-                <a:spcPts val="600"/>
-              </a:spcBef>
-              <a:defRPr sz="1200">
-                <a:solidFill>
-                  <a:srgbClr val="94A3B8"/>
-                </a:solidFill>
-              </a:defRPr>
-            </a:pPr>
-          </a:p>
-          <a:p>
-            <a:pPr algn="l">
-              <a:spcBef>
-                <a:spcPts val="600"/>
-              </a:spcBef>
-              <a:defRPr sz="1200">
-                <a:solidFill>
-                  <a:srgbClr val="94A3B8"/>
-                </a:solidFill>
-              </a:defRPr>
-            </a:pPr>
-            <a:r>
-              <a:t>• Fraudsters adapt to static rules and find low-and-slow blind spots.</a:t>
-            </a:r>
-          </a:p>
-          <a:p>
-            <a:pPr algn="l">
-              <a:spcBef>
-                <a:spcPts val="600"/>
-              </a:spcBef>
-              <a:defRPr sz="1200">
-                <a:solidFill>
-                  <a:srgbClr val="94A3B8"/>
-                </a:solidFill>
-              </a:defRPr>
-            </a:pPr>
-            <a:r>
-              <a:t>• Models score well on historical data but miss fresh evasion techniques.</a:t>
-            </a:r>
-          </a:p>
-          <a:p>
-            <a:pPr algn="l">
-              <a:spcBef>
-                <a:spcPts val="600"/>
-              </a:spcBef>
-              <a:defRPr sz="1200">
-                <a:solidFill>
-                  <a:srgbClr val="94A3B8"/>
-                </a:solidFill>
-              </a:defRPr>
-            </a:pPr>
-            <a:r>
-              <a:t>• Missed attacks are logged but rarely retrained systematically.</a:t>
-            </a:r>
-          </a:p>
-          <a:p>
-            <a:pPr algn="l">
-              <a:spcBef>
-                <a:spcPts val="600"/>
-              </a:spcBef>
-              <a:defRPr sz="1200">
-                <a:solidFill>
-                  <a:srgbClr val="94A3B8"/>
-                </a:solidFill>
-              </a:defRPr>
-            </a:pPr>
-          </a:p>
-          <a:p>
-            <a:pPr algn="l">
-              <a:spcBef>
-                <a:spcPts val="600"/>
-              </a:spcBef>
-              <a:defRPr sz="1200">
-                <a:solidFill>
-                  <a:srgbClr val="FFFFFF"/>
-                </a:solidFill>
-              </a:defRPr>
-            </a:pPr>
-            <a:r>
-              <a:t>★ Missing Link: Continuous Red-Team adversarial learning loop.</a:t>
+              <a:t>The 3 Blind Spots in Modern Banking</a:t>
+            </a:r>
+          </a:p>
+          <a:p>
+            <a:pPr algn="l">
+              <a:spcBef>
+                <a:spcPts val="500"/>
+              </a:spcBef>
+              <a:defRPr sz="1200">
+                <a:solidFill>
+                  <a:srgbClr val="94A3B8"/>
+                </a:solidFill>
+              </a:defRPr>
+            </a:pPr>
+            <a:r>
+              <a:t>1. The Coerced Human (Layer 1 Blind Spot):</a:t>
+            </a:r>
+          </a:p>
+          <a:p>
+            <a:pPr algn="l">
+              <a:spcBef>
+                <a:spcPts val="500"/>
+              </a:spcBef>
+              <a:defRPr sz="1200">
+                <a:solidFill>
+                  <a:srgbClr val="94A3B8"/>
+                </a:solidFill>
+              </a:defRPr>
+            </a:pPr>
+            <a:r>
+              <a:t>   • Traditional models don't look at user interaction stress, long hesitation pauses, or active calls during payment.</a:t>
+            </a:r>
+          </a:p>
+          <a:p>
+            <a:pPr algn="l">
+              <a:spcBef>
+                <a:spcPts val="500"/>
+              </a:spcBef>
+              <a:defRPr sz="1200">
+                <a:solidFill>
+                  <a:srgbClr val="94A3B8"/>
+                </a:solidFill>
+              </a:defRPr>
+            </a:pPr>
+          </a:p>
+          <a:p>
+            <a:pPr algn="l">
+              <a:spcBef>
+                <a:spcPts val="500"/>
+              </a:spcBef>
+              <a:defRPr sz="1200">
+                <a:solidFill>
+                  <a:srgbClr val="94A3B8"/>
+                </a:solidFill>
+              </a:defRPr>
+            </a:pPr>
+            <a:r>
+              <a:t>2. The Distributed Mule Web (Layer 3 Blind Spot):</a:t>
+            </a:r>
+          </a:p>
+          <a:p>
+            <a:pPr algn="l">
+              <a:spcBef>
+                <a:spcPts val="500"/>
+              </a:spcBef>
+              <a:defRPr sz="1200">
+                <a:solidFill>
+                  <a:srgbClr val="94A3B8"/>
+                </a:solidFill>
+              </a:defRPr>
+            </a:pPr>
+            <a:r>
+              <a:t>   • Attackers break stolen money into 200 micro-payments of ₹2,000 across sleeper accounts. Row-by-row models miss the network.</a:t>
+            </a:r>
+          </a:p>
+          <a:p>
+            <a:pPr algn="l">
+              <a:spcBef>
+                <a:spcPts val="500"/>
+              </a:spcBef>
+              <a:defRPr sz="1200">
+                <a:solidFill>
+                  <a:srgbClr val="94A3B8"/>
+                </a:solidFill>
+              </a:defRPr>
+            </a:pPr>
+          </a:p>
+          <a:p>
+            <a:pPr algn="l">
+              <a:spcBef>
+                <a:spcPts val="500"/>
+              </a:spcBef>
+              <a:defRPr sz="1200">
+                <a:solidFill>
+                  <a:srgbClr val="94A3B8"/>
+                </a:solidFill>
+              </a:defRPr>
+            </a:pPr>
+            <a:r>
+              <a:t>3. The Static Rule Shield:</a:t>
+            </a:r>
+          </a:p>
+          <a:p>
+            <a:pPr algn="l">
+              <a:spcBef>
+                <a:spcPts val="500"/>
+              </a:spcBef>
+              <a:defRPr sz="1200">
+                <a:solidFill>
+                  <a:srgbClr val="94A3B8"/>
+                </a:solidFill>
+              </a:defRPr>
+            </a:pPr>
+            <a:r>
+              <a:t>   • Once deployed, banking models stay frozen while cybercriminals adapt low-and-slow stealth tactics.</a:t>
+            </a:r>
+          </a:p>
+          <a:p>
+            <a:pPr algn="l">
+              <a:spcBef>
+                <a:spcPts val="500"/>
+              </a:spcBef>
+              <a:defRPr sz="1200">
+                <a:solidFill>
+                  <a:srgbClr val="94A3B8"/>
+                </a:solidFill>
+              </a:defRPr>
+            </a:pPr>
+          </a:p>
+          <a:p>
+            <a:pPr algn="l">
+              <a:spcBef>
+                <a:spcPts val="500"/>
+              </a:spcBef>
+              <a:defRPr sz="1200">
+                <a:solidFill>
+                  <a:srgbClr val="FFFFFF"/>
+                </a:solidFill>
+              </a:defRPr>
+            </a:pPr>
+            <a:r>
+              <a:t>★ Our Mission: Build a humanized, self-healing 3-layer defense.</a:t>
             </a:r>
           </a:p>
         </p:txBody>
@@ -5813,7 +5792,7 @@
               </a:defRPr>
             </a:pPr>
             <a:r>
-              <a:t>CORE INNOVATION</a:t>
+              <a:t>OUR SOLUTION</a:t>
             </a:r>
           </a:p>
         </p:txBody>
@@ -5848,7 +5827,7 @@
               </a:defRPr>
             </a:pPr>
             <a:r>
-              <a:t>The Multi-Layered Defense Triad Architecture</a:t>
+              <a:t>The 3-Layer Safety Net: From Keystroke to Settlement</a:t>
             </a:r>
           </a:p>
         </p:txBody>
@@ -5883,7 +5862,7 @@
               </a:defRPr>
             </a:pPr>
             <a:r>
-              <a:t>A multi-dimensional defense platform protecting transactions from keystroke to settlement.</a:t>
+              <a:t>Protecting transactions across the three distinct spaces where financial crime actually happens.</a:t>
             </a:r>
           </a:p>
         </p:txBody>
@@ -5903,7 +5882,7 @@
             <a:avLst/>
           </a:prstGeom>
           <a:solidFill>
-            <a:srgbClr val="1E293B"/>
+            <a:srgbClr val="161E2E"/>
           </a:solidFill>
           <a:ln w="19050">
             <a:solidFill>
@@ -5937,136 +5916,136 @@
               </a:defRPr>
             </a:pPr>
             <a:r>
-              <a:t>Layer 1: Interaction Level</a:t>
-            </a:r>
-          </a:p>
-          <a:p>
-            <a:pPr algn="l">
-              <a:spcBef>
-                <a:spcPts val="600"/>
-              </a:spcBef>
-              <a:defRPr sz="1200">
-                <a:solidFill>
-                  <a:srgbClr val="94A3B8"/>
-                </a:solidFill>
-              </a:defRPr>
-            </a:pPr>
-            <a:r>
-              <a:t>Behavioral Biometrics Engine</a:t>
-            </a:r>
-          </a:p>
-          <a:p>
-            <a:pPr algn="l">
-              <a:spcBef>
-                <a:spcPts val="600"/>
-              </a:spcBef>
-              <a:defRPr sz="1200">
-                <a:solidFill>
-                  <a:srgbClr val="94A3B8"/>
-                </a:solidFill>
-              </a:defRPr>
-            </a:pPr>
-            <a:r>
-              <a:t>Focus: User Coercion &amp; Bot Telemetry</a:t>
-            </a:r>
-          </a:p>
-          <a:p>
-            <a:pPr algn="l">
-              <a:spcBef>
-                <a:spcPts val="600"/>
-              </a:spcBef>
-              <a:defRPr sz="1200">
-                <a:solidFill>
-                  <a:srgbClr val="94A3B8"/>
-                </a:solidFill>
-              </a:defRPr>
-            </a:pPr>
-          </a:p>
-          <a:p>
-            <a:pPr algn="l">
-              <a:spcBef>
-                <a:spcPts val="600"/>
-              </a:spcBef>
-              <a:defRPr sz="1200">
-                <a:solidFill>
-                  <a:srgbClr val="94A3B8"/>
-                </a:solidFill>
-              </a:defRPr>
-            </a:pPr>
-            <a:r>
-              <a:t>• Real-time keystroke dwell &amp; flight time</a:t>
-            </a:r>
-          </a:p>
-          <a:p>
-            <a:pPr algn="l">
-              <a:spcBef>
-                <a:spcPts val="600"/>
-              </a:spcBef>
-              <a:defRPr sz="1200">
-                <a:solidFill>
-                  <a:srgbClr val="94A3B8"/>
-                </a:solidFill>
-              </a:defRPr>
-            </a:pPr>
-            <a:r>
-              <a:t>• Submission hesitation index (&gt;4.5s)</a:t>
-            </a:r>
-          </a:p>
-          <a:p>
-            <a:pPr algn="l">
-              <a:spcBef>
-                <a:spcPts val="600"/>
-              </a:spcBef>
-              <a:defRPr sz="1200">
-                <a:solidFill>
-                  <a:srgbClr val="94A3B8"/>
-                </a:solidFill>
-              </a:defRPr>
-            </a:pPr>
-            <a:r>
-              <a:t>• Active voice call &amp; remote desktop flags</a:t>
-            </a:r>
-          </a:p>
-          <a:p>
-            <a:pPr algn="l">
-              <a:spcBef>
-                <a:spcPts val="600"/>
-              </a:spcBef>
-              <a:defRPr sz="1200">
-                <a:solidFill>
-                  <a:srgbClr val="94A3B8"/>
-                </a:solidFill>
-              </a:defRPr>
-            </a:pPr>
-            <a:r>
-              <a:t>• Prevents Digital Arrest &amp; Session Hijack</a:t>
-            </a:r>
-          </a:p>
-          <a:p>
-            <a:pPr algn="l">
-              <a:spcBef>
-                <a:spcPts val="600"/>
-              </a:spcBef>
-              <a:defRPr sz="1200">
-                <a:solidFill>
-                  <a:srgbClr val="94A3B8"/>
-                </a:solidFill>
-              </a:defRPr>
-            </a:pPr>
-          </a:p>
-          <a:p>
-            <a:pPr algn="l">
-              <a:spcBef>
-                <a:spcPts val="600"/>
-              </a:spcBef>
-              <a:defRPr sz="1200">
-                <a:solidFill>
-                  <a:srgbClr val="94A3B8"/>
-                </a:solidFill>
-              </a:defRPr>
-            </a:pPr>
-            <a:r>
-              <a:t>Weight in Fusion: 20%</a:t>
+              <a:t>Layer 1: The Human Space</a:t>
+            </a:r>
+          </a:p>
+          <a:p>
+            <a:pPr algn="l">
+              <a:spcBef>
+                <a:spcPts val="500"/>
+              </a:spcBef>
+              <a:defRPr sz="1200">
+                <a:solidFill>
+                  <a:srgbClr val="94A3B8"/>
+                </a:solidFill>
+              </a:defRPr>
+            </a:pPr>
+            <a:r>
+              <a:t>Behavioral Biometrics</a:t>
+            </a:r>
+          </a:p>
+          <a:p>
+            <a:pPr algn="l">
+              <a:spcBef>
+                <a:spcPts val="500"/>
+              </a:spcBef>
+              <a:defRPr sz="1200">
+                <a:solidFill>
+                  <a:srgbClr val="94A3B8"/>
+                </a:solidFill>
+              </a:defRPr>
+            </a:pPr>
+            <a:r>
+              <a:t>Focus: Coercion &amp; Interaction Rhythm</a:t>
+            </a:r>
+          </a:p>
+          <a:p>
+            <a:pPr algn="l">
+              <a:spcBef>
+                <a:spcPts val="500"/>
+              </a:spcBef>
+              <a:defRPr sz="1200">
+                <a:solidFill>
+                  <a:srgbClr val="94A3B8"/>
+                </a:solidFill>
+              </a:defRPr>
+            </a:pPr>
+          </a:p>
+          <a:p>
+            <a:pPr algn="l">
+              <a:spcBef>
+                <a:spcPts val="500"/>
+              </a:spcBef>
+              <a:defRPr sz="1200">
+                <a:solidFill>
+                  <a:srgbClr val="FFFFFF"/>
+                </a:solidFill>
+              </a:defRPr>
+            </a:pPr>
+            <a:r>
+              <a:t>• Captures live keystroke dwell &amp; flight times</a:t>
+            </a:r>
+          </a:p>
+          <a:p>
+            <a:pPr algn="l">
+              <a:spcBef>
+                <a:spcPts val="500"/>
+              </a:spcBef>
+              <a:defRPr sz="1200">
+                <a:solidFill>
+                  <a:srgbClr val="FFFFFF"/>
+                </a:solidFill>
+              </a:defRPr>
+            </a:pPr>
+            <a:r>
+              <a:t>• Flags long hesitation pauses (&gt;4.5s)</a:t>
+            </a:r>
+          </a:p>
+          <a:p>
+            <a:pPr algn="l">
+              <a:spcBef>
+                <a:spcPts val="500"/>
+              </a:spcBef>
+              <a:defRPr sz="1200">
+                <a:solidFill>
+                  <a:srgbClr val="FFFFFF"/>
+                </a:solidFill>
+              </a:defRPr>
+            </a:pPr>
+            <a:r>
+              <a:t>• Detects ongoing voice calls during input</a:t>
+            </a:r>
+          </a:p>
+          <a:p>
+            <a:pPr algn="l">
+              <a:spcBef>
+                <a:spcPts val="500"/>
+              </a:spcBef>
+              <a:defRPr sz="1200">
+                <a:solidFill>
+                  <a:srgbClr val="FFFFFF"/>
+                </a:solidFill>
+              </a:defRPr>
+            </a:pPr>
+            <a:r>
+              <a:t>• Stops Digital Arrest scams at checkout</a:t>
+            </a:r>
+          </a:p>
+          <a:p>
+            <a:pPr algn="l">
+              <a:spcBef>
+                <a:spcPts val="500"/>
+              </a:spcBef>
+              <a:defRPr sz="1200">
+                <a:solidFill>
+                  <a:srgbClr val="94A3B8"/>
+                </a:solidFill>
+              </a:defRPr>
+            </a:pPr>
+          </a:p>
+          <a:p>
+            <a:pPr algn="l">
+              <a:spcBef>
+                <a:spcPts val="500"/>
+              </a:spcBef>
+              <a:defRPr sz="1200">
+                <a:solidFill>
+                  <a:srgbClr val="FFFFFF"/>
+                </a:solidFill>
+              </a:defRPr>
+            </a:pPr>
+            <a:r>
+              <a:t>✓ Fusion Weight: 20%</a:t>
             </a:r>
           </a:p>
         </p:txBody>
@@ -6086,7 +6065,7 @@
             <a:avLst/>
           </a:prstGeom>
           <a:solidFill>
-            <a:srgbClr val="1E293B"/>
+            <a:srgbClr val="161E2E"/>
           </a:solidFill>
           <a:ln w="19050">
             <a:solidFill>
@@ -6120,13 +6099,13 @@
               </a:defRPr>
             </a:pPr>
             <a:r>
-              <a:t>Layer 2: Transaction Level</a:t>
-            </a:r>
-          </a:p>
-          <a:p>
-            <a:pPr algn="l">
-              <a:spcBef>
-                <a:spcPts val="600"/>
+              <a:t>Layer 2: The Data Space</a:t>
+            </a:r>
+          </a:p>
+          <a:p>
+            <a:pPr algn="l">
+              <a:spcBef>
+                <a:spcPts val="500"/>
               </a:spcBef>
               <a:defRPr sz="1200">
                 <a:solidFill>
@@ -6141,38 +6120,38 @@
           <a:p>
             <a:pPr algn="l">
               <a:spcBef>
-                <a:spcPts val="600"/>
-              </a:spcBef>
-              <a:defRPr sz="1200">
-                <a:solidFill>
-                  <a:srgbClr val="94A3B8"/>
-                </a:solidFill>
-              </a:defRPr>
-            </a:pPr>
-            <a:r>
-              <a:t>Focus: Behavioral Anomaly &amp; Velocity</a:t>
-            </a:r>
-          </a:p>
-          <a:p>
-            <a:pPr algn="l">
-              <a:spcBef>
-                <a:spcPts val="600"/>
-              </a:spcBef>
-              <a:defRPr sz="1200">
-                <a:solidFill>
-                  <a:srgbClr val="94A3B8"/>
-                </a:solidFill>
-              </a:defRPr>
-            </a:pPr>
-          </a:p>
-          <a:p>
-            <a:pPr algn="l">
-              <a:spcBef>
-                <a:spcPts val="600"/>
-              </a:spcBef>
-              <a:defRPr sz="1200">
-                <a:solidFill>
-                  <a:srgbClr val="94A3B8"/>
+                <a:spcPts val="500"/>
+              </a:spcBef>
+              <a:defRPr sz="1200">
+                <a:solidFill>
+                  <a:srgbClr val="94A3B8"/>
+                </a:solidFill>
+              </a:defRPr>
+            </a:pPr>
+            <a:r>
+              <a:t>Focus: Speed, Velocity &amp; Math</a:t>
+            </a:r>
+          </a:p>
+          <a:p>
+            <a:pPr algn="l">
+              <a:spcBef>
+                <a:spcPts val="500"/>
+              </a:spcBef>
+              <a:defRPr sz="1200">
+                <a:solidFill>
+                  <a:srgbClr val="94A3B8"/>
+                </a:solidFill>
+              </a:defRPr>
+            </a:pPr>
+          </a:p>
+          <a:p>
+            <a:pPr algn="l">
+              <a:spcBef>
+                <a:spcPts val="500"/>
+              </a:spcBef>
+              <a:defRPr sz="1200">
+                <a:solidFill>
+                  <a:srgbClr val="FFFFFF"/>
                 </a:solidFill>
               </a:defRPr>
             </a:pPr>
@@ -6183,73 +6162,73 @@
           <a:p>
             <a:pPr algn="l">
               <a:spcBef>
-                <a:spcPts val="600"/>
-              </a:spcBef>
-              <a:defRPr sz="1200">
-                <a:solidFill>
-                  <a:srgbClr val="94A3B8"/>
-                </a:solidFill>
-              </a:defRPr>
-            </a:pPr>
-            <a:r>
-              <a:t>• Anti-feature tampering &amp; deviation scoring</a:t>
-            </a:r>
-          </a:p>
-          <a:p>
-            <a:pPr algn="l">
-              <a:spcBef>
-                <a:spcPts val="600"/>
-              </a:spcBef>
-              <a:defRPr sz="1200">
-                <a:solidFill>
-                  <a:srgbClr val="94A3B8"/>
-                </a:solidFill>
-              </a:defRPr>
-            </a:pPr>
-            <a:r>
-              <a:t>• Vectorized batch inference (32ms / 1K)</a:t>
-            </a:r>
-          </a:p>
-          <a:p>
-            <a:pPr algn="l">
-              <a:spcBef>
-                <a:spcPts val="600"/>
-              </a:spcBef>
-              <a:defRPr sz="1200">
-                <a:solidFill>
-                  <a:srgbClr val="94A3B8"/>
-                </a:solidFill>
-              </a:defRPr>
-            </a:pPr>
-            <a:r>
-              <a:t>• Exact TreeSHAP mathematical explainability</a:t>
-            </a:r>
-          </a:p>
-          <a:p>
-            <a:pPr algn="l">
-              <a:spcBef>
-                <a:spcPts val="600"/>
-              </a:spcBef>
-              <a:defRPr sz="1200">
-                <a:solidFill>
-                  <a:srgbClr val="94A3B8"/>
-                </a:solidFill>
-              </a:defRPr>
-            </a:pPr>
-          </a:p>
-          <a:p>
-            <a:pPr algn="l">
-              <a:spcBef>
-                <a:spcPts val="600"/>
-              </a:spcBef>
-              <a:defRPr sz="1200">
-                <a:solidFill>
-                  <a:srgbClr val="94A3B8"/>
-                </a:solidFill>
-              </a:defRPr>
-            </a:pPr>
-            <a:r>
-              <a:t>Weight in Fusion: 50%</a:t>
+                <a:spcPts val="500"/>
+              </a:spcBef>
+              <a:defRPr sz="1200">
+                <a:solidFill>
+                  <a:srgbClr val="FFFFFF"/>
+                </a:solidFill>
+              </a:defRPr>
+            </a:pPr>
+            <a:r>
+              <a:t>• Anti-injection: zero client metadata trust</a:t>
+            </a:r>
+          </a:p>
+          <a:p>
+            <a:pPr algn="l">
+              <a:spcBef>
+                <a:spcPts val="500"/>
+              </a:spcBef>
+              <a:defRPr sz="1200">
+                <a:solidFill>
+                  <a:srgbClr val="FFFFFF"/>
+                </a:solidFill>
+              </a:defRPr>
+            </a:pPr>
+            <a:r>
+              <a:t>• 1,000 transactions scored in 32ms</a:t>
+            </a:r>
+          </a:p>
+          <a:p>
+            <a:pPr algn="l">
+              <a:spcBef>
+                <a:spcPts val="500"/>
+              </a:spcBef>
+              <a:defRPr sz="1200">
+                <a:solidFill>
+                  <a:srgbClr val="FFFFFF"/>
+                </a:solidFill>
+              </a:defRPr>
+            </a:pPr>
+            <a:r>
+              <a:t>• TreeSHAP exact mathematical weights</a:t>
+            </a:r>
+          </a:p>
+          <a:p>
+            <a:pPr algn="l">
+              <a:spcBef>
+                <a:spcPts val="500"/>
+              </a:spcBef>
+              <a:defRPr sz="1200">
+                <a:solidFill>
+                  <a:srgbClr val="94A3B8"/>
+                </a:solidFill>
+              </a:defRPr>
+            </a:pPr>
+          </a:p>
+          <a:p>
+            <a:pPr algn="l">
+              <a:spcBef>
+                <a:spcPts val="500"/>
+              </a:spcBef>
+              <a:defRPr sz="1200">
+                <a:solidFill>
+                  <a:srgbClr val="FFFFFF"/>
+                </a:solidFill>
+              </a:defRPr>
+            </a:pPr>
+            <a:r>
+              <a:t>✓ Fusion Weight: 50%</a:t>
             </a:r>
           </a:p>
         </p:txBody>
@@ -6269,7 +6248,7 @@
             <a:avLst/>
           </a:prstGeom>
           <a:solidFill>
-            <a:srgbClr val="1E293B"/>
+            <a:srgbClr val="161E2E"/>
           </a:solidFill>
           <a:ln w="19050">
             <a:solidFill>
@@ -6303,13 +6282,13 @@
               </a:defRPr>
             </a:pPr>
             <a:r>
-              <a:t>Layer 3: Network Level</a:t>
-            </a:r>
-          </a:p>
-          <a:p>
-            <a:pPr algn="l">
-              <a:spcBef>
-                <a:spcPts val="600"/>
+              <a:t>Layer 3: The Network Space</a:t>
+            </a:r>
+          </a:p>
+          <a:p>
+            <a:pPr algn="l">
+              <a:spcBef>
+                <a:spcPts val="500"/>
               </a:spcBef>
               <a:defRPr sz="1200">
                 <a:solidFill>
@@ -6324,115 +6303,115 @@
           <a:p>
             <a:pPr algn="l">
               <a:spcBef>
-                <a:spcPts val="600"/>
-              </a:spcBef>
-              <a:defRPr sz="1200">
-                <a:solidFill>
-                  <a:srgbClr val="94A3B8"/>
-                </a:solidFill>
-              </a:defRPr>
-            </a:pPr>
-            <a:r>
-              <a:t>Focus: Account Linkages &amp; Topology</a:t>
-            </a:r>
-          </a:p>
-          <a:p>
-            <a:pPr algn="l">
-              <a:spcBef>
-                <a:spcPts val="600"/>
-              </a:spcBef>
-              <a:defRPr sz="1200">
-                <a:solidFill>
-                  <a:srgbClr val="94A3B8"/>
-                </a:solidFill>
-              </a:defRPr>
-            </a:pPr>
-          </a:p>
-          <a:p>
-            <a:pPr algn="l">
-              <a:spcBef>
-                <a:spcPts val="600"/>
-              </a:spcBef>
-              <a:defRPr sz="1200">
-                <a:solidFill>
-                  <a:srgbClr val="94A3B8"/>
-                </a:solidFill>
-              </a:defRPr>
-            </a:pPr>
-            <a:r>
-              <a:t>• Directed multigraph money-flow mapping</a:t>
-            </a:r>
-          </a:p>
-          <a:p>
-            <a:pPr algn="l">
-              <a:spcBef>
-                <a:spcPts val="600"/>
-              </a:spcBef>
-              <a:defRPr sz="1200">
-                <a:solidFill>
-                  <a:srgbClr val="94A3B8"/>
-                </a:solidFill>
-              </a:defRPr>
-            </a:pPr>
-            <a:r>
-              <a:t>• Cyclic fund routing detection (A→B→C→A)</a:t>
-            </a:r>
-          </a:p>
-          <a:p>
-            <a:pPr algn="l">
-              <a:spcBef>
-                <a:spcPts val="600"/>
-              </a:spcBef>
-              <a:defRPr sz="1200">
-                <a:solidFill>
-                  <a:srgbClr val="94A3B8"/>
-                </a:solidFill>
-              </a:defRPr>
-            </a:pPr>
-            <a:r>
-              <a:t>• Smurfing fan-out &amp; mule funneling alerts</a:t>
-            </a:r>
-          </a:p>
-          <a:p>
-            <a:pPr algn="l">
-              <a:spcBef>
-                <a:spcPts val="600"/>
-              </a:spcBef>
-              <a:defRPr sz="1200">
-                <a:solidFill>
-                  <a:srgbClr val="94A3B8"/>
-                </a:solidFill>
-              </a:defRPr>
-            </a:pPr>
-            <a:r>
-              <a:t>• Freezes coordinated syndicate clusters</a:t>
-            </a:r>
-          </a:p>
-          <a:p>
-            <a:pPr algn="l">
-              <a:spcBef>
-                <a:spcPts val="600"/>
-              </a:spcBef>
-              <a:defRPr sz="1200">
-                <a:solidFill>
-                  <a:srgbClr val="94A3B8"/>
-                </a:solidFill>
-              </a:defRPr>
-            </a:pPr>
-          </a:p>
-          <a:p>
-            <a:pPr algn="l">
-              <a:spcBef>
-                <a:spcPts val="600"/>
-              </a:spcBef>
-              <a:defRPr sz="1200">
-                <a:solidFill>
-                  <a:srgbClr val="94A3B8"/>
-                </a:solidFill>
-              </a:defRPr>
-            </a:pPr>
-            <a:r>
-              <a:t>Weight in Fusion: 30%</a:t>
+                <a:spcPts val="500"/>
+              </a:spcBef>
+              <a:defRPr sz="1200">
+                <a:solidFill>
+                  <a:srgbClr val="94A3B8"/>
+                </a:solidFill>
+              </a:defRPr>
+            </a:pPr>
+            <a:r>
+              <a:t>Focus: Account Graphs &amp; Smurfing</a:t>
+            </a:r>
+          </a:p>
+          <a:p>
+            <a:pPr algn="l">
+              <a:spcBef>
+                <a:spcPts val="500"/>
+              </a:spcBef>
+              <a:defRPr sz="1200">
+                <a:solidFill>
+                  <a:srgbClr val="94A3B8"/>
+                </a:solidFill>
+              </a:defRPr>
+            </a:pPr>
+          </a:p>
+          <a:p>
+            <a:pPr algn="l">
+              <a:spcBef>
+                <a:spcPts val="500"/>
+              </a:spcBef>
+              <a:defRPr sz="1200">
+                <a:solidFill>
+                  <a:srgbClr val="FFFFFF"/>
+                </a:solidFill>
+              </a:defRPr>
+            </a:pPr>
+            <a:r>
+              <a:t>• Directed graph tracking money flows</a:t>
+            </a:r>
+          </a:p>
+          <a:p>
+            <a:pPr algn="l">
+              <a:spcBef>
+                <a:spcPts val="500"/>
+              </a:spcBef>
+              <a:defRPr sz="1200">
+                <a:solidFill>
+                  <a:srgbClr val="FFFFFF"/>
+                </a:solidFill>
+              </a:defRPr>
+            </a:pPr>
+            <a:r>
+              <a:t>• Cyclic fund routing (A → B → C → A)</a:t>
+            </a:r>
+          </a:p>
+          <a:p>
+            <a:pPr algn="l">
+              <a:spcBef>
+                <a:spcPts val="500"/>
+              </a:spcBef>
+              <a:defRPr sz="1200">
+                <a:solidFill>
+                  <a:srgbClr val="FFFFFF"/>
+                </a:solidFill>
+              </a:defRPr>
+            </a:pPr>
+            <a:r>
+              <a:t>• Fan-out smurfing &amp; mule aggregation</a:t>
+            </a:r>
+          </a:p>
+          <a:p>
+            <a:pPr algn="l">
+              <a:spcBef>
+                <a:spcPts val="500"/>
+              </a:spcBef>
+              <a:defRPr sz="1200">
+                <a:solidFill>
+                  <a:srgbClr val="FFFFFF"/>
+                </a:solidFill>
+              </a:defRPr>
+            </a:pPr>
+            <a:r>
+              <a:t>• Freezes entire syndicates at once</a:t>
+            </a:r>
+          </a:p>
+          <a:p>
+            <a:pPr algn="l">
+              <a:spcBef>
+                <a:spcPts val="500"/>
+              </a:spcBef>
+              <a:defRPr sz="1200">
+                <a:solidFill>
+                  <a:srgbClr val="94A3B8"/>
+                </a:solidFill>
+              </a:defRPr>
+            </a:pPr>
+          </a:p>
+          <a:p>
+            <a:pPr algn="l">
+              <a:spcBef>
+                <a:spcPts val="500"/>
+              </a:spcBef>
+              <a:defRPr sz="1200">
+                <a:solidFill>
+                  <a:srgbClr val="FFFFFF"/>
+                </a:solidFill>
+              </a:defRPr>
+            </a:pPr>
+            <a:r>
+              <a:t>✓ Fusion Weight: 30%</a:t>
             </a:r>
           </a:p>
         </p:txBody>
@@ -6493,7 +6472,7 @@
               </a:defRPr>
             </a:pPr>
             <a:r>
-              <a:t>LAYER 1 DEEP-DIVE</a:t>
+              <a:t>LAYER 1 IN ACTION</a:t>
             </a:r>
           </a:p>
         </p:txBody>
@@ -6528,7 +6507,7 @@
               </a:defRPr>
             </a:pPr>
             <a:r>
-              <a:t>Behavioral Biometrics: Defeating Scams at the Keystroke Level</a:t>
+              <a:t>Protecting the Coerced User: Keystroke &amp; Call Telemetry</a:t>
             </a:r>
           </a:p>
         </p:txBody>
@@ -6563,7 +6542,7 @@
               </a:defRPr>
             </a:pPr>
             <a:r>
-              <a:t>Detecting psychological coercion and automated bots before the payment is even dispatched.</a:t>
+              <a:t>How we catch psychological distress and automated scripts before a payment is dispatched.</a:t>
             </a:r>
           </a:p>
         </p:txBody>
@@ -6583,7 +6562,7 @@
             <a:avLst/>
           </a:prstGeom>
           <a:solidFill>
-            <a:srgbClr val="1E293B"/>
+            <a:srgbClr val="161E2E"/>
           </a:solidFill>
           <a:ln w="19050">
             <a:solidFill>
@@ -6617,157 +6596,142 @@
               </a:defRPr>
             </a:pPr>
             <a:r>
-              <a:t>How Biometric Telemetry Works</a:t>
-            </a:r>
-          </a:p>
-          <a:p>
-            <a:pPr algn="l">
-              <a:spcBef>
-                <a:spcPts val="600"/>
-              </a:spcBef>
-              <a:defRPr sz="1200">
-                <a:solidFill>
-                  <a:srgbClr val="94A3B8"/>
-                </a:solidFill>
-              </a:defRPr>
-            </a:pPr>
-            <a:r>
-              <a:t>1. Live Keystroke Dynamics:</a:t>
-            </a:r>
-          </a:p>
-          <a:p>
-            <a:pPr algn="l">
-              <a:spcBef>
-                <a:spcPts val="600"/>
-              </a:spcBef>
-              <a:defRPr sz="1200">
-                <a:solidFill>
-                  <a:srgbClr val="94A3B8"/>
-                </a:solidFill>
-              </a:defRPr>
-            </a:pPr>
-            <a:r>
-              <a:t>   • Dwell Time: Duration key is held down (~90-150ms).</a:t>
-            </a:r>
-          </a:p>
-          <a:p>
-            <a:pPr algn="l">
-              <a:spcBef>
-                <a:spcPts val="600"/>
-              </a:spcBef>
-              <a:defRPr sz="1200">
-                <a:solidFill>
-                  <a:srgbClr val="94A3B8"/>
-                </a:solidFill>
-              </a:defRPr>
-            </a:pPr>
-            <a:r>
-              <a:t>   • Flight Time: Transition time between keys (~120-280ms).</a:t>
-            </a:r>
-          </a:p>
-          <a:p>
-            <a:pPr algn="l">
-              <a:spcBef>
-                <a:spcPts val="600"/>
-              </a:spcBef>
-              <a:defRPr sz="1200">
-                <a:solidFill>
-                  <a:srgbClr val="94A3B8"/>
-                </a:solidFill>
-              </a:defRPr>
-            </a:pPr>
-            <a:r>
-              <a:t>   • Bot Detection: Identifies inhuman 0ms key variance.</a:t>
-            </a:r>
-          </a:p>
-          <a:p>
-            <a:pPr algn="l">
-              <a:spcBef>
-                <a:spcPts val="600"/>
-              </a:spcBef>
-              <a:defRPr sz="1200">
-                <a:solidFill>
-                  <a:srgbClr val="94A3B8"/>
-                </a:solidFill>
-              </a:defRPr>
-            </a:pPr>
-          </a:p>
-          <a:p>
-            <a:pPr algn="l">
-              <a:spcBef>
-                <a:spcPts val="600"/>
-              </a:spcBef>
-              <a:defRPr sz="1200">
-                <a:solidFill>
-                  <a:srgbClr val="94A3B8"/>
-                </a:solidFill>
-              </a:defRPr>
-            </a:pPr>
-            <a:r>
-              <a:t>2. Psychological Coercion Indicators:</a:t>
-            </a:r>
-          </a:p>
-          <a:p>
-            <a:pPr algn="l">
-              <a:spcBef>
-                <a:spcPts val="600"/>
-              </a:spcBef>
-              <a:defRPr sz="1200">
-                <a:solidFill>
-                  <a:srgbClr val="94A3B8"/>
-                </a:solidFill>
-              </a:defRPr>
-            </a:pPr>
-            <a:r>
-              <a:t>   • Excessive hesitation prior to submit (&gt;4.5 seconds pause).</a:t>
-            </a:r>
-          </a:p>
-          <a:p>
-            <a:pPr algn="l">
-              <a:spcBef>
-                <a:spcPts val="600"/>
-              </a:spcBef>
-              <a:defRPr sz="1200">
-                <a:solidFill>
-                  <a:srgbClr val="94A3B8"/>
-                </a:solidFill>
-              </a:defRPr>
-            </a:pPr>
-            <a:r>
-              <a:t>   • High correction rate (frequent backspaces from anxiety).</a:t>
-            </a:r>
-          </a:p>
-          <a:p>
-            <a:pPr algn="l">
-              <a:spcBef>
-                <a:spcPts val="600"/>
-              </a:spcBef>
-              <a:defRPr sz="1200">
-                <a:solidFill>
-                  <a:srgbClr val="94A3B8"/>
-                </a:solidFill>
-              </a:defRPr>
-            </a:pPr>
-            <a:r>
-              <a:t>   • Active voice call during checkout (Vishing signature).</a:t>
-            </a:r>
-          </a:p>
-          <a:p>
-            <a:pPr algn="l">
-              <a:spcBef>
-                <a:spcPts val="600"/>
-              </a:spcBef>
-              <a:defRPr sz="1200">
-                <a:solidFill>
-                  <a:srgbClr val="94A3B8"/>
-                </a:solidFill>
-              </a:defRPr>
-            </a:pPr>
-          </a:p>
-          <a:p>
-            <a:pPr algn="l">
-              <a:spcBef>
-                <a:spcPts val="600"/>
+              <a:t>What the Engine Senses in Real Time</a:t>
+            </a:r>
+          </a:p>
+          <a:p>
+            <a:pPr algn="l">
+              <a:spcBef>
+                <a:spcPts val="500"/>
+              </a:spcBef>
+              <a:defRPr sz="1200">
+                <a:solidFill>
+                  <a:srgbClr val="94A3B8"/>
+                </a:solidFill>
+              </a:defRPr>
+            </a:pPr>
+            <a:r>
+              <a:t>1. Live Typing Rhythm (Dwell &amp; Flight Times):</a:t>
+            </a:r>
+          </a:p>
+          <a:p>
+            <a:pPr algn="l">
+              <a:spcBef>
+                <a:spcPts val="500"/>
+              </a:spcBef>
+              <a:defRPr sz="1200">
+                <a:solidFill>
+                  <a:srgbClr val="94A3B8"/>
+                </a:solidFill>
+              </a:defRPr>
+            </a:pPr>
+            <a:r>
+              <a:t>   • Genuine humans type with natural cadence (~90-160ms per key).</a:t>
+            </a:r>
+          </a:p>
+          <a:p>
+            <a:pPr algn="l">
+              <a:spcBef>
+                <a:spcPts val="500"/>
+              </a:spcBef>
+              <a:defRPr sz="1200">
+                <a:solidFill>
+                  <a:srgbClr val="94A3B8"/>
+                </a:solidFill>
+              </a:defRPr>
+            </a:pPr>
+            <a:r>
+              <a:t>   • Bots type with robotic 0ms variance or inhuman speed (&lt;25ms).</a:t>
+            </a:r>
+          </a:p>
+          <a:p>
+            <a:pPr algn="l">
+              <a:spcBef>
+                <a:spcPts val="500"/>
+              </a:spcBef>
+              <a:defRPr sz="1200">
+                <a:solidFill>
+                  <a:srgbClr val="94A3B8"/>
+                </a:solidFill>
+              </a:defRPr>
+            </a:pPr>
+          </a:p>
+          <a:p>
+            <a:pPr algn="l">
+              <a:spcBef>
+                <a:spcPts val="500"/>
+              </a:spcBef>
+              <a:defRPr sz="1200">
+                <a:solidFill>
+                  <a:srgbClr val="94A3B8"/>
+                </a:solidFill>
+              </a:defRPr>
+            </a:pPr>
+            <a:r>
+              <a:t>2. The Psychological Distress Signature:</a:t>
+            </a:r>
+          </a:p>
+          <a:p>
+            <a:pPr algn="l">
+              <a:spcBef>
+                <a:spcPts val="500"/>
+              </a:spcBef>
+              <a:defRPr sz="1200">
+                <a:solidFill>
+                  <a:srgbClr val="94A3B8"/>
+                </a:solidFill>
+              </a:defRPr>
+            </a:pPr>
+            <a:r>
+              <a:t>   • Extreme hesitation pause on the 'Pay' button (&gt;4.5 seconds).</a:t>
+            </a:r>
+          </a:p>
+          <a:p>
+            <a:pPr algn="l">
+              <a:spcBef>
+                <a:spcPts val="500"/>
+              </a:spcBef>
+              <a:defRPr sz="1200">
+                <a:solidFill>
+                  <a:srgbClr val="94A3B8"/>
+                </a:solidFill>
+              </a:defRPr>
+            </a:pPr>
+            <a:r>
+              <a:t>   • Elevated backspace count (anxious corrections).</a:t>
+            </a:r>
+          </a:p>
+          <a:p>
+            <a:pPr algn="l">
+              <a:spcBef>
+                <a:spcPts val="500"/>
+              </a:spcBef>
+              <a:defRPr sz="1200">
+                <a:solidFill>
+                  <a:srgbClr val="94A3B8"/>
+                </a:solidFill>
+              </a:defRPr>
+            </a:pPr>
+            <a:r>
+              <a:t>   • Active voice call active during checkout (Vishing marker).</a:t>
+            </a:r>
+          </a:p>
+          <a:p>
+            <a:pPr algn="l">
+              <a:spcBef>
+                <a:spcPts val="500"/>
+              </a:spcBef>
+              <a:defRPr sz="1200">
+                <a:solidFill>
+                  <a:srgbClr val="94A3B8"/>
+                </a:solidFill>
+              </a:defRPr>
+            </a:pPr>
+          </a:p>
+          <a:p>
+            <a:pPr algn="l">
+              <a:spcBef>
+                <a:spcPts val="500"/>
               </a:spcBef>
               <a:defRPr sz="1200">
                 <a:solidFill>
@@ -6782,16 +6746,16 @@
           <a:p>
             <a:pPr algn="l">
               <a:spcBef>
-                <a:spcPts val="600"/>
-              </a:spcBef>
-              <a:defRPr sz="1200">
-                <a:solidFill>
-                  <a:srgbClr val="94A3B8"/>
-                </a:solidFill>
-              </a:defRPr>
-            </a:pPr>
-            <a:r>
-              <a:t>   • Detects Anydesk/Teamviewer background hooks.</a:t>
+                <a:spcPts val="500"/>
+              </a:spcBef>
+              <a:defRPr sz="1200">
+                <a:solidFill>
+                  <a:srgbClr val="94A3B8"/>
+                </a:solidFill>
+              </a:defRPr>
+            </a:pPr>
+            <a:r>
+              <a:t>   • Detects AnyDesk/TeamViewer background hooks.</a:t>
             </a:r>
           </a:p>
         </p:txBody>
@@ -6811,7 +6775,7 @@
             <a:avLst/>
           </a:prstGeom>
           <a:solidFill>
-            <a:srgbClr val="1E293B"/>
+            <a:srgbClr val="161E2E"/>
           </a:solidFill>
           <a:ln w="19050">
             <a:solidFill>
@@ -6845,151 +6809,148 @@
               </a:defRPr>
             </a:pPr>
             <a:r>
-              <a:t>Live Scam Intervention Workflow</a:t>
-            </a:r>
-          </a:p>
-          <a:p>
-            <a:pPr algn="l">
-              <a:spcBef>
-                <a:spcPts val="600"/>
-              </a:spcBef>
-              <a:defRPr sz="1200">
-                <a:solidFill>
-                  <a:srgbClr val="94A3B8"/>
-                </a:solidFill>
-              </a:defRPr>
-            </a:pPr>
-            <a:r>
-              <a:t>Scenario: Citizen targeted by Digital Arrest scammer.</a:t>
-            </a:r>
-          </a:p>
-          <a:p>
-            <a:pPr algn="l">
-              <a:spcBef>
-                <a:spcPts val="600"/>
-              </a:spcBef>
-              <a:defRPr sz="1200">
-                <a:solidFill>
-                  <a:srgbClr val="94A3B8"/>
-                </a:solidFill>
-              </a:defRPr>
-            </a:pPr>
-          </a:p>
-          <a:p>
-            <a:pPr algn="l">
-              <a:spcBef>
-                <a:spcPts val="600"/>
-              </a:spcBef>
-              <a:defRPr sz="1200">
-                <a:solidFill>
-                  <a:srgbClr val="94A3B8"/>
-                </a:solidFill>
-              </a:defRPr>
-            </a:pPr>
-            <a:r>
-              <a:t>Step 1: Scammer orders victim to transfer ₹1,00,000 immediately.</a:t>
-            </a:r>
-          </a:p>
-          <a:p>
-            <a:pPr algn="l">
-              <a:spcBef>
-                <a:spcPts val="600"/>
-              </a:spcBef>
-              <a:defRPr sz="1200">
-                <a:solidFill>
-                  <a:srgbClr val="94A3B8"/>
-                </a:solidFill>
-              </a:defRPr>
-            </a:pPr>
-            <a:r>
-              <a:t>Step 2: Victim enters payment from genuine phone &amp; IP.</a:t>
-            </a:r>
-          </a:p>
-          <a:p>
-            <a:pPr algn="l">
-              <a:spcBef>
-                <a:spcPts val="600"/>
-              </a:spcBef>
-              <a:defRPr sz="1200">
-                <a:solidFill>
-                  <a:srgbClr val="94A3B8"/>
-                </a:solidFill>
-              </a:defRPr>
-            </a:pPr>
-            <a:r>
-              <a:t>Step 3: Biometrics engine detects active phone call + 6.8s submit hesitation + high backspace count.</a:t>
-            </a:r>
-          </a:p>
-          <a:p>
-            <a:pPr algn="l">
-              <a:spcBef>
-                <a:spcPts val="600"/>
-              </a:spcBef>
-              <a:defRPr sz="1200">
-                <a:solidFill>
-                  <a:srgbClr val="94A3B8"/>
-                </a:solidFill>
-              </a:defRPr>
-            </a:pPr>
-            <a:r>
-              <a:t>Step 4: Unified engine intercepts transaction and triggers:</a:t>
-            </a:r>
-          </a:p>
-          <a:p>
-            <a:pPr algn="l">
-              <a:spcBef>
-                <a:spcPts val="600"/>
-              </a:spcBef>
-              <a:defRPr sz="1200">
-                <a:solidFill>
-                  <a:srgbClr val="94A3B8"/>
-                </a:solidFill>
-              </a:defRPr>
-            </a:pPr>
-          </a:p>
-          <a:p>
-            <a:pPr algn="l">
-              <a:spcBef>
-                <a:spcPts val="600"/>
-              </a:spcBef>
-              <a:defRPr sz="1200">
-                <a:solidFill>
-                  <a:srgbClr val="FFFFFF"/>
-                </a:solidFill>
-              </a:defRPr>
-            </a:pPr>
-            <a:r>
-              <a:t>★ Policy Directive: COERCION_SAFETY_INTERVENTION</a:t>
-            </a:r>
-          </a:p>
-          <a:p>
-            <a:pPr algn="l">
-              <a:spcBef>
-                <a:spcPts val="600"/>
-              </a:spcBef>
-              <a:defRPr sz="1200">
-                <a:solidFill>
-                  <a:srgbClr val="FFFFFF"/>
-                </a:solidFill>
-              </a:defRPr>
-            </a:pPr>
-            <a:r>
-              <a:t>★ Action: Scam warning prompt + mandatory 15-min cooling delay.</a:t>
-            </a:r>
-          </a:p>
-          <a:p>
-            <a:pPr algn="l">
-              <a:spcBef>
-                <a:spcPts val="600"/>
-              </a:spcBef>
-              <a:defRPr sz="1200">
-                <a:solidFill>
-                  <a:srgbClr val="FFFFFF"/>
-                </a:solidFill>
-              </a:defRPr>
-            </a:pPr>
-            <a:r>
-              <a:t>★ Result: Transfer prevented before money leaves the bank.</a:t>
+              <a:t>The Life-Saving Safety Intervention</a:t>
+            </a:r>
+          </a:p>
+          <a:p>
+            <a:pPr algn="l">
+              <a:spcBef>
+                <a:spcPts val="500"/>
+              </a:spcBef>
+              <a:defRPr sz="1200">
+                <a:solidFill>
+                  <a:srgbClr val="94A3B8"/>
+                </a:solidFill>
+              </a:defRPr>
+            </a:pPr>
+            <a:r>
+              <a:t>What Happens When Coercion is Sensed:</a:t>
+            </a:r>
+          </a:p>
+          <a:p>
+            <a:pPr algn="l">
+              <a:spcBef>
+                <a:spcPts val="500"/>
+              </a:spcBef>
+              <a:defRPr sz="1200">
+                <a:solidFill>
+                  <a:srgbClr val="94A3B8"/>
+                </a:solidFill>
+              </a:defRPr>
+            </a:pPr>
+          </a:p>
+          <a:p>
+            <a:pPr algn="l">
+              <a:spcBef>
+                <a:spcPts val="500"/>
+              </a:spcBef>
+              <a:defRPr sz="1200">
+                <a:solidFill>
+                  <a:srgbClr val="94A3B8"/>
+                </a:solidFill>
+              </a:defRPr>
+            </a:pPr>
+            <a:r>
+              <a:t>Step 1: User types payment while pressured on a scam call.</a:t>
+            </a:r>
+          </a:p>
+          <a:p>
+            <a:pPr algn="l">
+              <a:spcBef>
+                <a:spcPts val="500"/>
+              </a:spcBef>
+              <a:defRPr sz="1200">
+                <a:solidFill>
+                  <a:srgbClr val="94A3B8"/>
+                </a:solidFill>
+              </a:defRPr>
+            </a:pPr>
+            <a:r>
+              <a:t>Step 2: Layer 1 detects active call + 6.8s submit hesitation.</a:t>
+            </a:r>
+          </a:p>
+          <a:p>
+            <a:pPr algn="l">
+              <a:spcBef>
+                <a:spcPts val="500"/>
+              </a:spcBef>
+              <a:defRPr sz="1200">
+                <a:solidFill>
+                  <a:srgbClr val="94A3B8"/>
+                </a:solidFill>
+              </a:defRPr>
+            </a:pPr>
+            <a:r>
+              <a:t>Step 3: Unified Engine triggers policy action:</a:t>
+            </a:r>
+          </a:p>
+          <a:p>
+            <a:pPr algn="l">
+              <a:spcBef>
+                <a:spcPts val="500"/>
+              </a:spcBef>
+              <a:defRPr sz="1200">
+                <a:solidFill>
+                  <a:srgbClr val="94A3B8"/>
+                </a:solidFill>
+              </a:defRPr>
+            </a:pPr>
+          </a:p>
+          <a:p>
+            <a:pPr algn="l">
+              <a:spcBef>
+                <a:spcPts val="500"/>
+              </a:spcBef>
+              <a:defRPr sz="1200">
+                <a:solidFill>
+                  <a:srgbClr val="FFFFFF"/>
+                </a:solidFill>
+              </a:defRPr>
+            </a:pPr>
+            <a:r>
+              <a:t>★ DIRECTIVE: COERCION_SAFETY_INTERVENTION</a:t>
+            </a:r>
+          </a:p>
+          <a:p>
+            <a:pPr algn="l">
+              <a:spcBef>
+                <a:spcPts val="500"/>
+              </a:spcBef>
+              <a:defRPr sz="1200">
+                <a:solidFill>
+                  <a:srgbClr val="FFFFFF"/>
+                </a:solidFill>
+              </a:defRPr>
+            </a:pPr>
+            <a:r>
+              <a:t>★ ACTION: Pops an unclosable scam warning modal &amp; enforces a 15-minute cooling-off delay.</a:t>
+            </a:r>
+          </a:p>
+          <a:p>
+            <a:pPr algn="l">
+              <a:spcBef>
+                <a:spcPts val="500"/>
+              </a:spcBef>
+              <a:defRPr sz="1200">
+                <a:solidFill>
+                  <a:srgbClr val="94A3B8"/>
+                </a:solidFill>
+              </a:defRPr>
+            </a:pPr>
+          </a:p>
+          <a:p>
+            <a:pPr algn="l">
+              <a:spcBef>
+                <a:spcPts val="500"/>
+              </a:spcBef>
+              <a:defRPr sz="1200">
+                <a:solidFill>
+                  <a:srgbClr val="FFFFFF"/>
+                </a:solidFill>
+              </a:defRPr>
+            </a:pPr>
+            <a:r>
+              <a:t>✓ Result: Breaks the scammer's psychological grip; citizen calls family/police before money leaves.</a:t>
             </a:r>
           </a:p>
         </p:txBody>
@@ -7050,7 +7011,7 @@
               </a:defRPr>
             </a:pPr>
             <a:r>
-              <a:t>LAYER 2 DEEP-DIVE</a:t>
+              <a:t>LAYER 2 IN ACTION</a:t>
             </a:r>
           </a:p>
         </p:txBody>
@@ -7085,7 +7046,7 @@
               </a:defRPr>
             </a:pPr>
             <a:r>
-              <a:t>Fortified XGBoost V4 &amp; Server-Side Feature Store</a:t>
+              <a:t>Sub-Millisecond Fraud Math: Zero Client Trust</a:t>
             </a:r>
           </a:p>
         </p:txBody>
@@ -7120,7 +7081,7 @@
               </a:defRPr>
             </a:pPr>
             <a:r>
-              <a:t>Sub-millisecond tabular inference backed by anti-injection real-time feature derivation.</a:t>
+              <a:t>How we score 1,000 transactions in 32ms and eliminate client-side feature tampering.</a:t>
             </a:r>
           </a:p>
         </p:txBody>
@@ -7140,7 +7101,7 @@
             <a:avLst/>
           </a:prstGeom>
           <a:solidFill>
-            <a:srgbClr val="1E293B"/>
+            <a:srgbClr val="161E2E"/>
           </a:solidFill>
           <a:ln w="19050">
             <a:solidFill>
@@ -7174,166 +7135,166 @@
               </a:defRPr>
             </a:pPr>
             <a:r>
-              <a:t>Anti-Injection Real-Time Feature Store</a:t>
-            </a:r>
-          </a:p>
-          <a:p>
-            <a:pPr algn="l">
-              <a:spcBef>
-                <a:spcPts val="600"/>
-              </a:spcBef>
-              <a:defRPr sz="1200">
-                <a:solidFill>
-                  <a:srgbClr val="94A3B8"/>
-                </a:solidFill>
-              </a:defRPr>
-            </a:pPr>
-            <a:r>
-              <a:t>The Vulnerability in Typical Fraud Models:</a:t>
-            </a:r>
-          </a:p>
-          <a:p>
-            <a:pPr algn="l">
-              <a:spcBef>
-                <a:spcPts val="600"/>
-              </a:spcBef>
-              <a:defRPr sz="1200">
-                <a:solidFill>
-                  <a:srgbClr val="94A3B8"/>
-                </a:solidFill>
-              </a:defRPr>
-            </a:pPr>
-            <a:r>
-              <a:t>• Naive APIs trust client metadata (e.g. client says velocity is 1).</a:t>
-            </a:r>
-          </a:p>
-          <a:p>
-            <a:pPr algn="l">
-              <a:spcBef>
-                <a:spcPts val="600"/>
-              </a:spcBef>
-              <a:defRPr sz="1200">
-                <a:solidFill>
-                  <a:srgbClr val="94A3B8"/>
-                </a:solidFill>
-              </a:defRPr>
-            </a:pPr>
-            <a:r>
-              <a:t>• Attackers tamper with payload to bypass the model.</a:t>
-            </a:r>
-          </a:p>
-          <a:p>
-            <a:pPr algn="l">
-              <a:spcBef>
-                <a:spcPts val="600"/>
-              </a:spcBef>
-              <a:defRPr sz="1200">
-                <a:solidFill>
-                  <a:srgbClr val="94A3B8"/>
-                </a:solidFill>
-              </a:defRPr>
-            </a:pPr>
-          </a:p>
-          <a:p>
-            <a:pPr algn="l">
-              <a:spcBef>
-                <a:spcPts val="600"/>
-              </a:spcBef>
-              <a:defRPr sz="1200">
-                <a:solidFill>
-                  <a:srgbClr val="94A3B8"/>
-                </a:solidFill>
-              </a:defRPr>
-            </a:pPr>
-            <a:r>
-              <a:t>Our Server-Side Solution (RealTimeFeatureStore):</a:t>
-            </a:r>
-          </a:p>
-          <a:p>
-            <a:pPr algn="l">
-              <a:spcBef>
-                <a:spcPts val="600"/>
-              </a:spcBef>
-              <a:defRPr sz="1200">
-                <a:solidFill>
-                  <a:srgbClr val="94A3B8"/>
-                </a:solidFill>
-              </a:defRPr>
-            </a:pPr>
-            <a:r>
-              <a:t>• Ingests raw minimal payment (amount, merchant, card).</a:t>
-            </a:r>
-          </a:p>
-          <a:p>
-            <a:pPr algn="l">
-              <a:spcBef>
-                <a:spcPts val="600"/>
-              </a:spcBef>
-              <a:defRPr sz="1200">
-                <a:solidFill>
-                  <a:srgbClr val="94A3B8"/>
-                </a:solidFill>
-              </a:defRPr>
-            </a:pPr>
-            <a:r>
-              <a:t>• Server automatically computes rolling 5m velocity.</a:t>
-            </a:r>
-          </a:p>
-          <a:p>
-            <a:pPr algn="l">
-              <a:spcBef>
-                <a:spcPts val="600"/>
-              </a:spcBef>
-              <a:defRPr sz="1200">
-                <a:solidFill>
-                  <a:srgbClr val="94A3B8"/>
-                </a:solidFill>
-              </a:defRPr>
-            </a:pPr>
-            <a:r>
-              <a:t>• Server calculates 30-day historical spending averages.</a:t>
-            </a:r>
-          </a:p>
-          <a:p>
-            <a:pPr algn="l">
-              <a:spcBef>
-                <a:spcPts val="600"/>
-              </a:spcBef>
-              <a:defRPr sz="1200">
-                <a:solidFill>
-                  <a:srgbClr val="94A3B8"/>
-                </a:solidFill>
-              </a:defRPr>
-            </a:pPr>
-            <a:r>
-              <a:t>• Threat-intel IP reputation score derived server-side.</a:t>
-            </a:r>
-          </a:p>
-          <a:p>
-            <a:pPr algn="l">
-              <a:spcBef>
-                <a:spcPts val="600"/>
-              </a:spcBef>
-              <a:defRPr sz="1200">
-                <a:solidFill>
-                  <a:srgbClr val="94A3B8"/>
-                </a:solidFill>
-              </a:defRPr>
-            </a:pPr>
-          </a:p>
-          <a:p>
-            <a:pPr algn="l">
-              <a:spcBef>
-                <a:spcPts val="600"/>
-              </a:spcBef>
-              <a:defRPr sz="1200">
-                <a:solidFill>
-                  <a:srgbClr val="FFFFFF"/>
-                </a:solidFill>
-              </a:defRPr>
-            </a:pPr>
-            <a:r>
-              <a:t>✓ 100% Anti-Tamper &amp; Zero Client Trust.</a:t>
+              <a:t>Anti-Tamper Real-Time Feature Store</a:t>
+            </a:r>
+          </a:p>
+          <a:p>
+            <a:pPr algn="l">
+              <a:spcBef>
+                <a:spcPts val="500"/>
+              </a:spcBef>
+              <a:defRPr sz="1200">
+                <a:solidFill>
+                  <a:srgbClr val="94A3B8"/>
+                </a:solidFill>
+              </a:defRPr>
+            </a:pPr>
+            <a:r>
+              <a:t>The Fatal Flaw in Many Fraud APIs:</a:t>
+            </a:r>
+          </a:p>
+          <a:p>
+            <a:pPr algn="l">
+              <a:spcBef>
+                <a:spcPts val="500"/>
+              </a:spcBef>
+              <a:defRPr sz="1200">
+                <a:solidFill>
+                  <a:srgbClr val="FFFFFF"/>
+                </a:solidFill>
+              </a:defRPr>
+            </a:pPr>
+            <a:r>
+              <a:t>• Naive systems trust client payloads (e.g. client says velocity is 1).</a:t>
+            </a:r>
+          </a:p>
+          <a:p>
+            <a:pPr algn="l">
+              <a:spcBef>
+                <a:spcPts val="500"/>
+              </a:spcBef>
+              <a:defRPr sz="1200">
+                <a:solidFill>
+                  <a:srgbClr val="FFFFFF"/>
+                </a:solidFill>
+              </a:defRPr>
+            </a:pPr>
+            <a:r>
+              <a:t>• Hackers edit the JSON payload to fool the model.</a:t>
+            </a:r>
+          </a:p>
+          <a:p>
+            <a:pPr algn="l">
+              <a:spcBef>
+                <a:spcPts val="500"/>
+              </a:spcBef>
+              <a:defRPr sz="1200">
+                <a:solidFill>
+                  <a:srgbClr val="94A3B8"/>
+                </a:solidFill>
+              </a:defRPr>
+            </a:pPr>
+          </a:p>
+          <a:p>
+            <a:pPr algn="l">
+              <a:spcBef>
+                <a:spcPts val="500"/>
+              </a:spcBef>
+              <a:defRPr sz="1200">
+                <a:solidFill>
+                  <a:srgbClr val="94A3B8"/>
+                </a:solidFill>
+              </a:defRPr>
+            </a:pPr>
+            <a:r>
+              <a:t>Our Fix (RealTimeFeatureStore):</a:t>
+            </a:r>
+          </a:p>
+          <a:p>
+            <a:pPr algn="l">
+              <a:spcBef>
+                <a:spcPts val="500"/>
+              </a:spcBef>
+              <a:defRPr sz="1200">
+                <a:solidFill>
+                  <a:srgbClr val="FFFFFF"/>
+                </a:solidFill>
+              </a:defRPr>
+            </a:pPr>
+            <a:r>
+              <a:t>• Accepts raw minimal payment (₹ Amount, Merchant, Card).</a:t>
+            </a:r>
+          </a:p>
+          <a:p>
+            <a:pPr algn="l">
+              <a:spcBef>
+                <a:spcPts val="500"/>
+              </a:spcBef>
+              <a:defRPr sz="1200">
+                <a:solidFill>
+                  <a:srgbClr val="FFFFFF"/>
+                </a:solidFill>
+              </a:defRPr>
+            </a:pPr>
+            <a:r>
+              <a:t>• Server computes rolling 5-minute velocity independently.</a:t>
+            </a:r>
+          </a:p>
+          <a:p>
+            <a:pPr algn="l">
+              <a:spcBef>
+                <a:spcPts val="500"/>
+              </a:spcBef>
+              <a:defRPr sz="1200">
+                <a:solidFill>
+                  <a:srgbClr val="FFFFFF"/>
+                </a:solidFill>
+              </a:defRPr>
+            </a:pPr>
+            <a:r>
+              <a:t>• Server derives historical 30-day spending averages.</a:t>
+            </a:r>
+          </a:p>
+          <a:p>
+            <a:pPr algn="l">
+              <a:spcBef>
+                <a:spcPts val="500"/>
+              </a:spcBef>
+              <a:defRPr sz="1200">
+                <a:solidFill>
+                  <a:srgbClr val="FFFFFF"/>
+                </a:solidFill>
+              </a:defRPr>
+            </a:pPr>
+            <a:r>
+              <a:t>• Threat-intel IP reputation verified server-side.</a:t>
+            </a:r>
+          </a:p>
+          <a:p>
+            <a:pPr algn="l">
+              <a:spcBef>
+                <a:spcPts val="500"/>
+              </a:spcBef>
+              <a:defRPr sz="1200">
+                <a:solidFill>
+                  <a:srgbClr val="94A3B8"/>
+                </a:solidFill>
+              </a:defRPr>
+            </a:pPr>
+          </a:p>
+          <a:p>
+            <a:pPr algn="l">
+              <a:spcBef>
+                <a:spcPts val="500"/>
+              </a:spcBef>
+              <a:defRPr sz="1200">
+                <a:solidFill>
+                  <a:srgbClr val="FFFFFF"/>
+                </a:solidFill>
+              </a:defRPr>
+            </a:pPr>
+            <a:r>
+              <a:t>✓ Zero Client Trust &amp; Tamper-Proof Ingestion.</a:t>
             </a:r>
           </a:p>
         </p:txBody>
@@ -7353,7 +7314,7 @@
             <a:avLst/>
           </a:prstGeom>
           <a:solidFill>
-            <a:srgbClr val="1E293B"/>
+            <a:srgbClr val="161E2E"/>
           </a:solidFill>
           <a:ln w="19050">
             <a:solidFill>
@@ -7387,32 +7348,32 @@
               </a:defRPr>
             </a:pPr>
             <a:r>
-              <a:t>Performance &amp; TreeSHAP Explainability</a:t>
-            </a:r>
-          </a:p>
-          <a:p>
-            <a:pPr algn="l">
-              <a:spcBef>
-                <a:spcPts val="600"/>
-              </a:spcBef>
-              <a:defRPr sz="1200">
-                <a:solidFill>
-                  <a:srgbClr val="94A3B8"/>
-                </a:solidFill>
-              </a:defRPr>
-            </a:pPr>
-            <a:r>
-              <a:t>High-Throughput Vectorized Inference:</a:t>
-            </a:r>
-          </a:p>
-          <a:p>
-            <a:pPr algn="l">
-              <a:spcBef>
-                <a:spcPts val="600"/>
-              </a:spcBef>
-              <a:defRPr sz="1200">
-                <a:solidFill>
-                  <a:srgbClr val="94A3B8"/>
+              <a:t>32ms Vectorized Speed &amp; TreeSHAP Math</a:t>
+            </a:r>
+          </a:p>
+          <a:p>
+            <a:pPr algn="l">
+              <a:spcBef>
+                <a:spcPts val="500"/>
+              </a:spcBef>
+              <a:defRPr sz="1200">
+                <a:solidFill>
+                  <a:srgbClr val="94A3B8"/>
+                </a:solidFill>
+              </a:defRPr>
+            </a:pPr>
+            <a:r>
+              <a:t>Vectorized Batch Inference:</a:t>
+            </a:r>
+          </a:p>
+          <a:p>
+            <a:pPr algn="l">
+              <a:spcBef>
+                <a:spcPts val="500"/>
+              </a:spcBef>
+              <a:defRPr sz="1200">
+                <a:solidFill>
+                  <a:srgbClr val="FFFFFF"/>
                 </a:solidFill>
               </a:defRPr>
             </a:pPr>
@@ -7423,53 +7384,68 @@
           <a:p>
             <a:pPr algn="l">
               <a:spcBef>
-                <a:spcPts val="600"/>
-              </a:spcBef>
-              <a:defRPr sz="1200">
-                <a:solidFill>
-                  <a:srgbClr val="94A3B8"/>
-                </a:solidFill>
-              </a:defRPr>
-            </a:pPr>
-            <a:r>
-              <a:t>• Scores 1,000 synthetic attacks in 32 milliseconds (0.032s).</a:t>
-            </a:r>
-          </a:p>
-          <a:p>
-            <a:pPr algn="l">
-              <a:spcBef>
-                <a:spcPts val="600"/>
-              </a:spcBef>
-              <a:defRPr sz="1200">
-                <a:solidFill>
-                  <a:srgbClr val="94A3B8"/>
-                </a:solidFill>
-              </a:defRPr>
-            </a:pPr>
-          </a:p>
-          <a:p>
-            <a:pPr algn="l">
-              <a:spcBef>
-                <a:spcPts val="600"/>
-              </a:spcBef>
-              <a:defRPr sz="1200">
-                <a:solidFill>
-                  <a:srgbClr val="94A3B8"/>
-                </a:solidFill>
-              </a:defRPr>
-            </a:pPr>
-            <a:r>
-              <a:t>Exact TreeSHAP Marginal Contributions:</a:t>
-            </a:r>
-          </a:p>
-          <a:p>
-            <a:pPr algn="l">
-              <a:spcBef>
-                <a:spcPts val="600"/>
-              </a:spcBef>
-              <a:defRPr sz="1200">
-                <a:solidFill>
-                  <a:srgbClr val="94A3B8"/>
+                <a:spcPts val="500"/>
+              </a:spcBef>
+              <a:defRPr sz="1200">
+                <a:solidFill>
+                  <a:srgbClr val="FFFFFF"/>
+                </a:solidFill>
+              </a:defRPr>
+            </a:pPr>
+            <a:r>
+              <a:t>• Evaluates 1,000 transactions in 32 milliseconds (0.032s).</a:t>
+            </a:r>
+          </a:p>
+          <a:p>
+            <a:pPr algn="l">
+              <a:spcBef>
+                <a:spcPts val="500"/>
+              </a:spcBef>
+              <a:defRPr sz="1200">
+                <a:solidFill>
+                  <a:srgbClr val="FFFFFF"/>
+                </a:solidFill>
+              </a:defRPr>
+            </a:pPr>
+            <a:r>
+              <a:t>• Ready for high-volume gateways like UPI / NPCI.</a:t>
+            </a:r>
+          </a:p>
+          <a:p>
+            <a:pPr algn="l">
+              <a:spcBef>
+                <a:spcPts val="500"/>
+              </a:spcBef>
+              <a:defRPr sz="1200">
+                <a:solidFill>
+                  <a:srgbClr val="94A3B8"/>
+                </a:solidFill>
+              </a:defRPr>
+            </a:pPr>
+          </a:p>
+          <a:p>
+            <a:pPr algn="l">
+              <a:spcBef>
+                <a:spcPts val="500"/>
+              </a:spcBef>
+              <a:defRPr sz="1200">
+                <a:solidFill>
+                  <a:srgbClr val="94A3B8"/>
+                </a:solidFill>
+              </a:defRPr>
+            </a:pPr>
+            <a:r>
+              <a:t>Exact TreeSHAP Mathematical Proof:</a:t>
+            </a:r>
+          </a:p>
+          <a:p>
+            <a:pPr algn="l">
+              <a:spcBef>
+                <a:spcPts val="500"/>
+              </a:spcBef>
+              <a:defRPr sz="1200">
+                <a:solidFill>
+                  <a:srgbClr val="FFFFFF"/>
                 </a:solidFill>
               </a:defRPr>
             </a:pPr>
@@ -7480,58 +7456,58 @@
           <a:p>
             <a:pPr algn="l">
               <a:spcBef>
-                <a:spcPts val="600"/>
-              </a:spcBef>
-              <a:defRPr sz="1200">
-                <a:solidFill>
-                  <a:srgbClr val="94A3B8"/>
-                </a:solidFill>
-              </a:defRPr>
-            </a:pPr>
-            <a:r>
-              <a:t>• Identifies top positive risk drivers (e.g. +3.44 on velocity).</a:t>
-            </a:r>
-          </a:p>
-          <a:p>
-            <a:pPr algn="l">
-              <a:spcBef>
-                <a:spcPts val="600"/>
-              </a:spcBef>
-              <a:defRPr sz="1200">
-                <a:solidFill>
-                  <a:srgbClr val="94A3B8"/>
-                </a:solidFill>
-              </a:defRPr>
-            </a:pPr>
-            <a:r>
-              <a:t>• Identifies negative safety anchors (e.g. -0.87 on established device).</a:t>
-            </a:r>
-          </a:p>
-          <a:p>
-            <a:pPr algn="l">
-              <a:spcBef>
-                <a:spcPts val="600"/>
-              </a:spcBef>
-              <a:defRPr sz="1200">
-                <a:solidFill>
-                  <a:srgbClr val="94A3B8"/>
-                </a:solidFill>
-              </a:defRPr>
-            </a:pPr>
-          </a:p>
-          <a:p>
-            <a:pPr algn="l">
-              <a:spcBef>
-                <a:spcPts val="600"/>
-              </a:spcBef>
-              <a:defRPr sz="1200">
-                <a:solidFill>
-                  <a:srgbClr val="FFFFFF"/>
-                </a:solidFill>
-              </a:defRPr>
-            </a:pPr>
-            <a:r>
-              <a:t>✓ Eliminates LLM hallucinations during compliance explanations.</a:t>
+                <a:spcPts val="500"/>
+              </a:spcBef>
+              <a:defRPr sz="1200">
+                <a:solidFill>
+                  <a:srgbClr val="FFFFFF"/>
+                </a:solidFill>
+              </a:defRPr>
+            </a:pPr>
+            <a:r>
+              <a:t>• Identifies positive risk drivers: `[+] Velocity (+3.44)`</a:t>
+            </a:r>
+          </a:p>
+          <a:p>
+            <a:pPr algn="l">
+              <a:spcBef>
+                <a:spcPts val="500"/>
+              </a:spcBef>
+              <a:defRPr sz="1200">
+                <a:solidFill>
+                  <a:srgbClr val="FFFFFF"/>
+                </a:solidFill>
+              </a:defRPr>
+            </a:pPr>
+            <a:r>
+              <a:t>• Identifies negative safety anchors: `[-] Device Age (-0.74)`</a:t>
+            </a:r>
+          </a:p>
+          <a:p>
+            <a:pPr algn="l">
+              <a:spcBef>
+                <a:spcPts val="500"/>
+              </a:spcBef>
+              <a:defRPr sz="1200">
+                <a:solidFill>
+                  <a:srgbClr val="94A3B8"/>
+                </a:solidFill>
+              </a:defRPr>
+            </a:pPr>
+          </a:p>
+          <a:p>
+            <a:pPr algn="l">
+              <a:spcBef>
+                <a:spcPts val="500"/>
+              </a:spcBef>
+              <a:defRPr sz="1200">
+                <a:solidFill>
+                  <a:srgbClr val="FFFFFF"/>
+                </a:solidFill>
+              </a:defRPr>
+            </a:pPr>
+            <a:r>
+              <a:t>✓ Eliminates LLM hallucinations in compliance reports.</a:t>
             </a:r>
           </a:p>
         </p:txBody>
@@ -7592,7 +7568,7 @@
               </a:defRPr>
             </a:pPr>
             <a:r>
-              <a:t>LAYER 3 DEEP-DIVE</a:t>
+              <a:t>LAYER 3 IN ACTION</a:t>
             </a:r>
           </a:p>
         </p:txBody>
@@ -7627,7 +7603,7 @@
               </a:defRPr>
             </a:pPr>
             <a:r>
-              <a:t>Graph Network &amp; Mule Ring Link Analysis</a:t>
+              <a:t>Detective Work on Graphs: Dismantling Mule Rings</a:t>
             </a:r>
           </a:p>
         </p:txBody>
@@ -7662,7 +7638,7 @@
               </a:defRPr>
             </a:pPr>
             <a:r>
-              <a:t>Dismantling smurfing fan-outs and cyclic money laundering networks in real time.</a:t>
+              <a:t>How Graph Neural Network analysis catches coordinated smurfing and cyclic money laundering.</a:t>
             </a:r>
           </a:p>
         </p:txBody>
@@ -7682,7 +7658,7 @@
             <a:avLst/>
           </a:prstGeom>
           <a:solidFill>
-            <a:srgbClr val="1E293B"/>
+            <a:srgbClr val="161E2E"/>
           </a:solidFill>
           <a:ln w="19050">
             <a:solidFill>
@@ -7716,13 +7692,13 @@
               </a:defRPr>
             </a:pPr>
             <a:r>
-              <a:t>Graph Analysis Capabilities</a:t>
-            </a:r>
-          </a:p>
-          <a:p>
-            <a:pPr algn="l">
-              <a:spcBef>
-                <a:spcPts val="600"/>
+              <a:t>How Graph Link Analysis Works</a:t>
+            </a:r>
+          </a:p>
+          <a:p>
+            <a:pPr algn="l">
+              <a:spcBef>
+                <a:spcPts val="500"/>
               </a:spcBef>
               <a:defRPr sz="1200">
                 <a:solidFill>
@@ -7737,49 +7713,34 @@
           <a:p>
             <a:pPr algn="l">
               <a:spcBef>
-                <a:spcPts val="600"/>
-              </a:spcBef>
-              <a:defRPr sz="1200">
-                <a:solidFill>
-                  <a:srgbClr val="94A3B8"/>
-                </a:solidFill>
-              </a:defRPr>
-            </a:pPr>
-            <a:r>
-              <a:t>   • Tracks nodes (Accounts, Beneficiaries, Merchants).</a:t>
-            </a:r>
-          </a:p>
-          <a:p>
-            <a:pPr algn="l">
-              <a:spcBef>
-                <a:spcPts val="600"/>
-              </a:spcBef>
-              <a:defRPr sz="1200">
-                <a:solidFill>
-                  <a:srgbClr val="94A3B8"/>
-                </a:solidFill>
-              </a:defRPr>
-            </a:pPr>
-            <a:r>
-              <a:t>   • Real-time graph adjacency and transaction edges.</a:t>
-            </a:r>
-          </a:p>
-          <a:p>
-            <a:pPr algn="l">
-              <a:spcBef>
-                <a:spcPts val="600"/>
-              </a:spcBef>
-              <a:defRPr sz="1200">
-                <a:solidFill>
-                  <a:srgbClr val="94A3B8"/>
-                </a:solidFill>
-              </a:defRPr>
-            </a:pPr>
-          </a:p>
-          <a:p>
-            <a:pPr algn="l">
-              <a:spcBef>
-                <a:spcPts val="600"/>
+                <a:spcPts val="500"/>
+              </a:spcBef>
+              <a:defRPr sz="1200">
+                <a:solidFill>
+                  <a:srgbClr val="94A3B8"/>
+                </a:solidFill>
+              </a:defRPr>
+            </a:pPr>
+            <a:r>
+              <a:t>   • Maps real-time relationships between accounts, cards, and merchants.</a:t>
+            </a:r>
+          </a:p>
+          <a:p>
+            <a:pPr algn="l">
+              <a:spcBef>
+                <a:spcPts val="500"/>
+              </a:spcBef>
+              <a:defRPr sz="1200">
+                <a:solidFill>
+                  <a:srgbClr val="94A3B8"/>
+                </a:solidFill>
+              </a:defRPr>
+            </a:pPr>
+          </a:p>
+          <a:p>
+            <a:pPr algn="l">
+              <a:spcBef>
+                <a:spcPts val="500"/>
               </a:spcBef>
               <a:defRPr sz="1200">
                 <a:solidFill>
@@ -7794,22 +7755,7 @@
           <a:p>
             <a:pPr algn="l">
               <a:spcBef>
-                <a:spcPts val="600"/>
-              </a:spcBef>
-              <a:defRPr sz="1200">
-                <a:solidFill>
-                  <a:srgbClr val="94A3B8"/>
-                </a:solidFill>
-              </a:defRPr>
-            </a:pPr>
-            <a:r>
-              <a:t>   • Traverses graph using BFS/DFS path analysis.</a:t>
-            </a:r>
-          </a:p>
-          <a:p>
-            <a:pPr algn="l">
-              <a:spcBef>
-                <a:spcPts val="600"/>
+                <a:spcPts val="500"/>
               </a:spcBef>
               <a:defRPr sz="1200">
                 <a:solidFill>
@@ -7824,49 +7770,64 @@
           <a:p>
             <a:pPr algn="l">
               <a:spcBef>
-                <a:spcPts val="600"/>
-              </a:spcBef>
-              <a:defRPr sz="1200">
-                <a:solidFill>
-                  <a:srgbClr val="94A3B8"/>
-                </a:solidFill>
-              </a:defRPr>
-            </a:pPr>
-          </a:p>
-          <a:p>
-            <a:pPr algn="l">
-              <a:spcBef>
-                <a:spcPts val="600"/>
-              </a:spcBef>
-              <a:defRPr sz="1200">
-                <a:solidFill>
-                  <a:srgbClr val="94A3B8"/>
-                </a:solidFill>
-              </a:defRPr>
-            </a:pPr>
-            <a:r>
-              <a:t>3. Smurfing Fan-Out &amp; Mule Funneling:</a:t>
-            </a:r>
-          </a:p>
-          <a:p>
-            <a:pPr algn="l">
-              <a:spcBef>
-                <a:spcPts val="600"/>
-              </a:spcBef>
-              <a:defRPr sz="1200">
-                <a:solidFill>
-                  <a:srgbClr val="94A3B8"/>
-                </a:solidFill>
-              </a:defRPr>
-            </a:pPr>
-            <a:r>
-              <a:t>   • Flags accounts dispersing funds to 4+ new mules.</a:t>
-            </a:r>
-          </a:p>
-          <a:p>
-            <a:pPr algn="l">
-              <a:spcBef>
-                <a:spcPts val="600"/>
+                <a:spcPts val="500"/>
+              </a:spcBef>
+              <a:defRPr sz="1200">
+                <a:solidFill>
+                  <a:srgbClr val="94A3B8"/>
+                </a:solidFill>
+              </a:defRPr>
+            </a:pPr>
+            <a:r>
+              <a:t>   • Catches syndicates recycling funds to disguise their origin.</a:t>
+            </a:r>
+          </a:p>
+          <a:p>
+            <a:pPr algn="l">
+              <a:spcBef>
+                <a:spcPts val="500"/>
+              </a:spcBef>
+              <a:defRPr sz="1200">
+                <a:solidFill>
+                  <a:srgbClr val="94A3B8"/>
+                </a:solidFill>
+              </a:defRPr>
+            </a:pPr>
+          </a:p>
+          <a:p>
+            <a:pPr algn="l">
+              <a:spcBef>
+                <a:spcPts val="500"/>
+              </a:spcBef>
+              <a:defRPr sz="1200">
+                <a:solidFill>
+                  <a:srgbClr val="94A3B8"/>
+                </a:solidFill>
+              </a:defRPr>
+            </a:pPr>
+            <a:r>
+              <a:t>3. Smurfing Fan-Out &amp; Aggregation:</a:t>
+            </a:r>
+          </a:p>
+          <a:p>
+            <a:pPr algn="l">
+              <a:spcBef>
+                <a:spcPts val="500"/>
+              </a:spcBef>
+              <a:defRPr sz="1200">
+                <a:solidFill>
+                  <a:srgbClr val="94A3B8"/>
+                </a:solidFill>
+              </a:defRPr>
+            </a:pPr>
+            <a:r>
+              <a:t>   • Flags accounts rapidly dispersing micro-transfers to 4+ sleeper mules.</a:t>
+            </a:r>
+          </a:p>
+          <a:p>
+            <a:pPr algn="l">
+              <a:spcBef>
+                <a:spcPts val="500"/>
               </a:spcBef>
               <a:defRPr sz="1200">
                 <a:solidFill>
@@ -7895,7 +7856,7 @@
             <a:avLst/>
           </a:prstGeom>
           <a:solidFill>
-            <a:srgbClr val="1E293B"/>
+            <a:srgbClr val="161E2E"/>
           </a:solidFill>
           <a:ln w="19050">
             <a:solidFill>
@@ -7929,55 +7890,55 @@
               </a:defRPr>
             </a:pPr>
             <a:r>
-              <a:t>Mule Syndicate Neutralization</a:t>
-            </a:r>
-          </a:p>
-          <a:p>
-            <a:pPr algn="l">
-              <a:spcBef>
-                <a:spcPts val="600"/>
-              </a:spcBef>
-              <a:defRPr sz="1200">
-                <a:solidFill>
-                  <a:srgbClr val="94A3B8"/>
-                </a:solidFill>
-              </a:defRPr>
-            </a:pPr>
-            <a:r>
-              <a:t>Scenario: Criminal syndicate laundering ₹20 Lakhs.</a:t>
-            </a:r>
-          </a:p>
-          <a:p>
-            <a:pPr algn="l">
-              <a:spcBef>
-                <a:spcPts val="600"/>
-              </a:spcBef>
-              <a:defRPr sz="1200">
-                <a:solidFill>
-                  <a:srgbClr val="94A3B8"/>
-                </a:solidFill>
-              </a:defRPr>
-            </a:pPr>
-          </a:p>
-          <a:p>
-            <a:pPr algn="l">
-              <a:spcBef>
-                <a:spcPts val="600"/>
-              </a:spcBef>
-              <a:defRPr sz="1200">
-                <a:solidFill>
-                  <a:srgbClr val="94A3B8"/>
-                </a:solidFill>
-              </a:defRPr>
-            </a:pPr>
-            <a:r>
-              <a:t>Step 1: Stolen money dispersed across 5 sleeper mule accounts.</a:t>
-            </a:r>
-          </a:p>
-          <a:p>
-            <a:pPr algn="l">
-              <a:spcBef>
-                <a:spcPts val="600"/>
+              <a:t>The Syndicate Freeze Action</a:t>
+            </a:r>
+          </a:p>
+          <a:p>
+            <a:pPr algn="l">
+              <a:spcBef>
+                <a:spcPts val="500"/>
+              </a:spcBef>
+              <a:defRPr sz="1200">
+                <a:solidFill>
+                  <a:srgbClr val="94A3B8"/>
+                </a:solidFill>
+              </a:defRPr>
+            </a:pPr>
+            <a:r>
+              <a:t>Scenario: Criminal syndicate laundering ₹25 Lakhs.</a:t>
+            </a:r>
+          </a:p>
+          <a:p>
+            <a:pPr algn="l">
+              <a:spcBef>
+                <a:spcPts val="500"/>
+              </a:spcBef>
+              <a:defRPr sz="1200">
+                <a:solidFill>
+                  <a:srgbClr val="94A3B8"/>
+                </a:solidFill>
+              </a:defRPr>
+            </a:pPr>
+          </a:p>
+          <a:p>
+            <a:pPr algn="l">
+              <a:spcBef>
+                <a:spcPts val="500"/>
+              </a:spcBef>
+              <a:defRPr sz="1200">
+                <a:solidFill>
+                  <a:srgbClr val="94A3B8"/>
+                </a:solidFill>
+              </a:defRPr>
+            </a:pPr>
+            <a:r>
+              <a:t>Step 1: Stolen funds dispersed across 5 sleeper mule accounts.</a:t>
+            </a:r>
+          </a:p>
+          <a:p>
+            <a:pPr algn="l">
+              <a:spcBef>
+                <a:spcPts val="500"/>
               </a:spcBef>
               <a:defRPr sz="1200">
                 <a:solidFill>
@@ -7992,88 +7953,73 @@
           <a:p>
             <a:pPr algn="l">
               <a:spcBef>
-                <a:spcPts val="600"/>
-              </a:spcBef>
-              <a:defRPr sz="1200">
-                <a:solidFill>
-                  <a:srgbClr val="94A3B8"/>
-                </a:solidFill>
-              </a:defRPr>
-            </a:pPr>
-            <a:r>
-              <a:t>Step 3: Mules attempt to recycle funds back to an aggregator.</a:t>
-            </a:r>
-          </a:p>
-          <a:p>
-            <a:pPr algn="l">
-              <a:spcBef>
-                <a:spcPts val="600"/>
-              </a:spcBef>
-              <a:defRPr sz="1200">
-                <a:solidFill>
-                  <a:srgbClr val="94A3B8"/>
-                </a:solidFill>
-              </a:defRPr>
-            </a:pPr>
-            <a:r>
-              <a:t>Step 4: Cyclic flow algorithm flags closed laundering path.</a:t>
-            </a:r>
-          </a:p>
-          <a:p>
-            <a:pPr algn="l">
-              <a:spcBef>
-                <a:spcPts val="600"/>
-              </a:spcBef>
-              <a:defRPr sz="1200">
-                <a:solidFill>
-                  <a:srgbClr val="94A3B8"/>
-                </a:solidFill>
-              </a:defRPr>
-            </a:pPr>
-          </a:p>
-          <a:p>
-            <a:pPr algn="l">
-              <a:spcBef>
-                <a:spcPts val="600"/>
-              </a:spcBef>
-              <a:defRPr sz="1200">
-                <a:solidFill>
-                  <a:srgbClr val="FFFFFF"/>
-                </a:solidFill>
-              </a:defRPr>
-            </a:pPr>
-            <a:r>
-              <a:t>★ Policy Directive: MULE_SYNDICATE_FREEZE</a:t>
-            </a:r>
-          </a:p>
-          <a:p>
-            <a:pPr algn="l">
-              <a:spcBef>
-                <a:spcPts val="600"/>
-              </a:spcBef>
-              <a:defRPr sz="1200">
-                <a:solidFill>
-                  <a:srgbClr val="FFFFFF"/>
-                </a:solidFill>
-              </a:defRPr>
-            </a:pPr>
-            <a:r>
-              <a:t>★ Action: Entire sub-graph isolated and accounts frozen instantly.</a:t>
-            </a:r>
-          </a:p>
-          <a:p>
-            <a:pPr algn="l">
-              <a:spcBef>
-                <a:spcPts val="600"/>
-              </a:spcBef>
-              <a:defRPr sz="1200">
-                <a:solidFill>
-                  <a:srgbClr val="FFFFFF"/>
-                </a:solidFill>
-              </a:defRPr>
-            </a:pPr>
-            <a:r>
-              <a:t>★ Result: Money laundering ring dismantled in one operation.</a:t>
+                <a:spcPts val="500"/>
+              </a:spcBef>
+              <a:defRPr sz="1200">
+                <a:solidFill>
+                  <a:srgbClr val="94A3B8"/>
+                </a:solidFill>
+              </a:defRPr>
+            </a:pPr>
+            <a:r>
+              <a:t>Step 3: Mules attempt to funnel funds back to an aggregator.</a:t>
+            </a:r>
+          </a:p>
+          <a:p>
+            <a:pPr algn="l">
+              <a:spcBef>
+                <a:spcPts val="500"/>
+              </a:spcBef>
+              <a:defRPr sz="1200">
+                <a:solidFill>
+                  <a:srgbClr val="94A3B8"/>
+                </a:solidFill>
+              </a:defRPr>
+            </a:pPr>
+            <a:r>
+              <a:t>Step 4: Cyclic flow algorithm flags closed laundering loop.</a:t>
+            </a:r>
+          </a:p>
+          <a:p>
+            <a:pPr algn="l">
+              <a:spcBef>
+                <a:spcPts val="500"/>
+              </a:spcBef>
+              <a:defRPr sz="1200">
+                <a:solidFill>
+                  <a:srgbClr val="94A3B8"/>
+                </a:solidFill>
+              </a:defRPr>
+            </a:pPr>
+          </a:p>
+          <a:p>
+            <a:pPr algn="l">
+              <a:spcBef>
+                <a:spcPts val="500"/>
+              </a:spcBef>
+              <a:defRPr sz="1200">
+                <a:solidFill>
+                  <a:srgbClr val="FFFFFF"/>
+                </a:solidFill>
+              </a:defRPr>
+            </a:pPr>
+            <a:r>
+              <a:t>★ DIRECTIVE: MULE_SYNDICATE_FREEZE</a:t>
+            </a:r>
+          </a:p>
+          <a:p>
+            <a:pPr algn="l">
+              <a:spcBef>
+                <a:spcPts val="500"/>
+              </a:spcBef>
+              <a:defRPr sz="1200">
+                <a:solidFill>
+                  <a:srgbClr val="FFFFFF"/>
+                </a:solidFill>
+              </a:defRPr>
+            </a:pPr>
+            <a:r>
+              <a:t>★ ACTION: Isolates the entire sub-graph and freezes all connected mule accounts in one operation.</a:t>
             </a:r>
           </a:p>
         </p:txBody>
@@ -8169,7 +8115,7 @@
               </a:defRPr>
             </a:pPr>
             <a:r>
-              <a:t>Unified Multi-Layer Decision Fusion Engine</a:t>
+              <a:t>Unified Decision Fusion: Frictionless Yet Impenetrable</a:t>
             </a:r>
           </a:p>
         </p:txBody>
@@ -8204,7 +8150,7 @@
               </a:defRPr>
             </a:pPr>
             <a:r>
-              <a:t>Ensemble weighting and targeted action directives for zero customer friction and max security.</a:t>
+              <a:t>Balancing zero-friction everyday purchases with targeted interventions against real threats.</a:t>
             </a:r>
           </a:p>
         </p:txBody>
@@ -8224,7 +8170,7 @@
             <a:avLst/>
           </a:prstGeom>
           <a:solidFill>
-            <a:srgbClr val="1E293B"/>
+            <a:srgbClr val="161E2E"/>
           </a:solidFill>
           <a:ln w="19050">
             <a:solidFill>
@@ -8264,7 +8210,7 @@
           <a:p>
             <a:pPr algn="l">
               <a:spcBef>
-                <a:spcPts val="600"/>
+                <a:spcPts val="500"/>
               </a:spcBef>
               <a:defRPr sz="1200">
                 <a:solidFill>
@@ -8279,38 +8225,38 @@
           <a:p>
             <a:pPr algn="l">
               <a:spcBef>
-                <a:spcPts val="600"/>
-              </a:spcBef>
-              <a:defRPr sz="1200">
-                <a:solidFill>
-                  <a:srgbClr val="94A3B8"/>
-                </a:solidFill>
-              </a:defRPr>
-            </a:pPr>
-            <a:r>
-              <a:t>Color Directive: Emerald Green</a:t>
-            </a:r>
-          </a:p>
-          <a:p>
-            <a:pPr algn="l">
-              <a:spcBef>
-                <a:spcPts val="600"/>
-              </a:spcBef>
-              <a:defRPr sz="1200">
-                <a:solidFill>
-                  <a:srgbClr val="94A3B8"/>
-                </a:solidFill>
-              </a:defRPr>
-            </a:pPr>
-          </a:p>
-          <a:p>
-            <a:pPr algn="l">
-              <a:spcBef>
-                <a:spcPts val="600"/>
-              </a:spcBef>
-              <a:defRPr sz="1200">
-                <a:solidFill>
-                  <a:srgbClr val="94A3B8"/>
+                <a:spcPts val="500"/>
+              </a:spcBef>
+              <a:defRPr sz="1200">
+                <a:solidFill>
+                  <a:srgbClr val="94A3B8"/>
+                </a:solidFill>
+              </a:defRPr>
+            </a:pPr>
+            <a:r>
+              <a:t>Color: Emerald Green</a:t>
+            </a:r>
+          </a:p>
+          <a:p>
+            <a:pPr algn="l">
+              <a:spcBef>
+                <a:spcPts val="500"/>
+              </a:spcBef>
+              <a:defRPr sz="1200">
+                <a:solidFill>
+                  <a:srgbClr val="94A3B8"/>
+                </a:solidFill>
+              </a:defRPr>
+            </a:pPr>
+          </a:p>
+          <a:p>
+            <a:pPr algn="l">
+              <a:spcBef>
+                <a:spcPts val="500"/>
+              </a:spcBef>
+              <a:defRPr sz="1200">
+                <a:solidFill>
+                  <a:srgbClr val="FFFFFF"/>
                 </a:solidFill>
               </a:defRPr>
             </a:pPr>
@@ -8321,11 +8267,11 @@
           <a:p>
             <a:pPr algn="l">
               <a:spcBef>
-                <a:spcPts val="600"/>
-              </a:spcBef>
-              <a:defRPr sz="1200">
-                <a:solidFill>
-                  <a:srgbClr val="94A3B8"/>
+                <a:spcPts val="500"/>
+              </a:spcBef>
+              <a:defRPr sz="1200">
+                <a:solidFill>
+                  <a:srgbClr val="FFFFFF"/>
                 </a:solidFill>
               </a:defRPr>
             </a:pPr>
@@ -8336,11 +8282,11 @@
           <a:p>
             <a:pPr algn="l">
               <a:spcBef>
-                <a:spcPts val="600"/>
-              </a:spcBef>
-              <a:defRPr sz="1200">
-                <a:solidFill>
-                  <a:srgbClr val="94A3B8"/>
+                <a:spcPts val="500"/>
+              </a:spcBef>
+              <a:defRPr sz="1200">
+                <a:solidFill>
+                  <a:srgbClr val="FFFFFF"/>
                 </a:solidFill>
               </a:defRPr>
             </a:pPr>
@@ -8351,28 +8297,28 @@
           <a:p>
             <a:pPr algn="l">
               <a:spcBef>
-                <a:spcPts val="600"/>
-              </a:spcBef>
-              <a:defRPr sz="1200">
-                <a:solidFill>
-                  <a:srgbClr val="94A3B8"/>
-                </a:solidFill>
-              </a:defRPr>
-            </a:pPr>
-          </a:p>
-          <a:p>
-            <a:pPr algn="l">
-              <a:spcBef>
-                <a:spcPts val="600"/>
-              </a:spcBef>
-              <a:defRPr sz="1200">
-                <a:solidFill>
-                  <a:srgbClr val="FFFFFF"/>
-                </a:solidFill>
-              </a:defRPr>
-            </a:pPr>
-            <a:r>
-              <a:t>✓ Instant seamless payment approval with zero user friction.</a:t>
+                <a:spcPts val="500"/>
+              </a:spcBef>
+              <a:defRPr sz="1200">
+                <a:solidFill>
+                  <a:srgbClr val="94A3B8"/>
+                </a:solidFill>
+              </a:defRPr>
+            </a:pPr>
+          </a:p>
+          <a:p>
+            <a:pPr algn="l">
+              <a:spcBef>
+                <a:spcPts val="500"/>
+              </a:spcBef>
+              <a:defRPr sz="1200">
+                <a:solidFill>
+                  <a:srgbClr val="FFFFFF"/>
+                </a:solidFill>
+              </a:defRPr>
+            </a:pPr>
+            <a:r>
+              <a:t>✓ 99% of normal users enjoy instant, seamless checkout without friction.</a:t>
             </a:r>
           </a:p>
         </p:txBody>
@@ -8392,7 +8338,7 @@
             <a:avLst/>
           </a:prstGeom>
           <a:solidFill>
-            <a:srgbClr val="1E293B"/>
+            <a:srgbClr val="161E2E"/>
           </a:solidFill>
           <a:ln w="19050">
             <a:solidFill>
@@ -8432,7 +8378,7 @@
           <a:p>
             <a:pPr algn="l">
               <a:spcBef>
-                <a:spcPts val="600"/>
+                <a:spcPts val="500"/>
               </a:spcBef>
               <a:defRPr sz="1200">
                 <a:solidFill>
@@ -8447,38 +8393,38 @@
           <a:p>
             <a:pPr algn="l">
               <a:spcBef>
-                <a:spcPts val="600"/>
-              </a:spcBef>
-              <a:defRPr sz="1200">
-                <a:solidFill>
-                  <a:srgbClr val="94A3B8"/>
-                </a:solidFill>
-              </a:defRPr>
-            </a:pPr>
-            <a:r>
-              <a:t>Color Directive: Amber Yellow</a:t>
-            </a:r>
-          </a:p>
-          <a:p>
-            <a:pPr algn="l">
-              <a:spcBef>
-                <a:spcPts val="600"/>
-              </a:spcBef>
-              <a:defRPr sz="1200">
-                <a:solidFill>
-                  <a:srgbClr val="94A3B8"/>
-                </a:solidFill>
-              </a:defRPr>
-            </a:pPr>
-          </a:p>
-          <a:p>
-            <a:pPr algn="l">
-              <a:spcBef>
-                <a:spcPts val="600"/>
-              </a:spcBef>
-              <a:defRPr sz="1200">
-                <a:solidFill>
-                  <a:srgbClr val="94A3B8"/>
+                <a:spcPts val="500"/>
+              </a:spcBef>
+              <a:defRPr sz="1200">
+                <a:solidFill>
+                  <a:srgbClr val="94A3B8"/>
+                </a:solidFill>
+              </a:defRPr>
+            </a:pPr>
+            <a:r>
+              <a:t>Color: Amber Yellow</a:t>
+            </a:r>
+          </a:p>
+          <a:p>
+            <a:pPr algn="l">
+              <a:spcBef>
+                <a:spcPts val="500"/>
+              </a:spcBef>
+              <a:defRPr sz="1200">
+                <a:solidFill>
+                  <a:srgbClr val="94A3B8"/>
+                </a:solidFill>
+              </a:defRPr>
+            </a:pPr>
+          </a:p>
+          <a:p>
+            <a:pPr algn="l">
+              <a:spcBef>
+                <a:spcPts val="500"/>
+              </a:spcBef>
+              <a:defRPr sz="1200">
+                <a:solidFill>
+                  <a:srgbClr val="FFFFFF"/>
                 </a:solidFill>
               </a:defRPr>
             </a:pPr>
@@ -8489,26 +8435,26 @@
           <a:p>
             <a:pPr algn="l">
               <a:spcBef>
-                <a:spcPts val="600"/>
-              </a:spcBef>
-              <a:defRPr sz="1200">
-                <a:solidFill>
-                  <a:srgbClr val="94A3B8"/>
-                </a:solidFill>
-              </a:defRPr>
-            </a:pPr>
-            <a:r>
-              <a:t>• Unfamiliar device or evening timing</a:t>
-            </a:r>
-          </a:p>
-          <a:p>
-            <a:pPr algn="l">
-              <a:spcBef>
-                <a:spcPts val="600"/>
-              </a:spcBef>
-              <a:defRPr sz="1200">
-                <a:solidFill>
-                  <a:srgbClr val="94A3B8"/>
+                <a:spcPts val="500"/>
+              </a:spcBef>
+              <a:defRPr sz="1200">
+                <a:solidFill>
+                  <a:srgbClr val="FFFFFF"/>
+                </a:solidFill>
+              </a:defRPr>
+            </a:pPr>
+            <a:r>
+              <a:t>• New device or late-night timing</a:t>
+            </a:r>
+          </a:p>
+          <a:p>
+            <a:pPr algn="l">
+              <a:spcBef>
+                <a:spcPts val="500"/>
+              </a:spcBef>
+              <a:defRPr sz="1200">
+                <a:solidFill>
+                  <a:srgbClr val="FFFFFF"/>
                 </a:solidFill>
               </a:defRPr>
             </a:pPr>
@@ -8519,28 +8465,28 @@
           <a:p>
             <a:pPr algn="l">
               <a:spcBef>
-                <a:spcPts val="600"/>
-              </a:spcBef>
-              <a:defRPr sz="1200">
-                <a:solidFill>
-                  <a:srgbClr val="94A3B8"/>
-                </a:solidFill>
-              </a:defRPr>
-            </a:pPr>
-          </a:p>
-          <a:p>
-            <a:pPr algn="l">
-              <a:spcBef>
-                <a:spcPts val="600"/>
-              </a:spcBef>
-              <a:defRPr sz="1200">
-                <a:solidFill>
-                  <a:srgbClr val="FFFFFF"/>
-                </a:solidFill>
-              </a:defRPr>
-            </a:pPr>
-            <a:r>
-              <a:t>✓ Triggers FIDO2 WebAuthn or Biometric Passkey challenge.</a:t>
+                <a:spcPts val="500"/>
+              </a:spcBef>
+              <a:defRPr sz="1200">
+                <a:solidFill>
+                  <a:srgbClr val="94A3B8"/>
+                </a:solidFill>
+              </a:defRPr>
+            </a:pPr>
+          </a:p>
+          <a:p>
+            <a:pPr algn="l">
+              <a:spcBef>
+                <a:spcPts val="500"/>
+              </a:spcBef>
+              <a:defRPr sz="1200">
+                <a:solidFill>
+                  <a:srgbClr val="FFFFFF"/>
+                </a:solidFill>
+              </a:defRPr>
+            </a:pPr>
+            <a:r>
+              <a:t>✓ Prompts for FIDO2 WebAuthn or Biometric Passkey verification.</a:t>
             </a:r>
           </a:p>
         </p:txBody>
@@ -8560,7 +8506,7 @@
             <a:avLst/>
           </a:prstGeom>
           <a:solidFill>
-            <a:srgbClr val="1E293B"/>
+            <a:srgbClr val="161E2E"/>
           </a:solidFill>
           <a:ln w="19050">
             <a:solidFill>
@@ -8600,7 +8546,7 @@
           <a:p>
             <a:pPr algn="l">
               <a:spcBef>
-                <a:spcPts val="600"/>
+                <a:spcPts val="500"/>
               </a:spcBef>
               <a:defRPr sz="1200">
                 <a:solidFill>
@@ -8615,19 +8561,19 @@
           <a:p>
             <a:pPr algn="l">
               <a:spcBef>
-                <a:spcPts val="600"/>
-              </a:spcBef>
-              <a:defRPr sz="1200">
-                <a:solidFill>
-                  <a:srgbClr val="94A3B8"/>
-                </a:solidFill>
-              </a:defRPr>
-            </a:pPr>
-          </a:p>
-          <a:p>
-            <a:pPr algn="l">
-              <a:spcBef>
-                <a:spcPts val="600"/>
+                <a:spcPts val="500"/>
+              </a:spcBef>
+              <a:defRPr sz="1200">
+                <a:solidFill>
+                  <a:srgbClr val="94A3B8"/>
+                </a:solidFill>
+              </a:defRPr>
+            </a:pPr>
+          </a:p>
+          <a:p>
+            <a:pPr algn="l">
+              <a:spcBef>
+                <a:spcPts val="500"/>
               </a:spcBef>
               <a:defRPr sz="1200">
                 <a:solidFill>
@@ -8642,11 +8588,11 @@
           <a:p>
             <a:pPr algn="l">
               <a:spcBef>
-                <a:spcPts val="600"/>
-              </a:spcBef>
-              <a:defRPr sz="1200">
-                <a:solidFill>
-                  <a:srgbClr val="94A3B8"/>
+                <a:spcPts val="500"/>
+              </a:spcBef>
+              <a:defRPr sz="1200">
+                <a:solidFill>
+                  <a:srgbClr val="FFFFFF"/>
                 </a:solidFill>
               </a:defRPr>
             </a:pPr>
@@ -8657,11 +8603,11 @@
           <a:p>
             <a:pPr algn="l">
               <a:spcBef>
-                <a:spcPts val="600"/>
-              </a:spcBef>
-              <a:defRPr sz="1200">
-                <a:solidFill>
-                  <a:srgbClr val="94A3B8"/>
+                <a:spcPts val="500"/>
+              </a:spcBef>
+              <a:defRPr sz="1200">
+                <a:solidFill>
+                  <a:srgbClr val="FFFFFF"/>
                 </a:solidFill>
               </a:defRPr>
             </a:pPr>
@@ -8672,19 +8618,19 @@
           <a:p>
             <a:pPr algn="l">
               <a:spcBef>
-                <a:spcPts val="600"/>
-              </a:spcBef>
-              <a:defRPr sz="1200">
-                <a:solidFill>
-                  <a:srgbClr val="94A3B8"/>
-                </a:solidFill>
-              </a:defRPr>
-            </a:pPr>
-          </a:p>
-          <a:p>
-            <a:pPr algn="l">
-              <a:spcBef>
-                <a:spcPts val="600"/>
+                <a:spcPts val="500"/>
+              </a:spcBef>
+              <a:defRPr sz="1200">
+                <a:solidFill>
+                  <a:srgbClr val="94A3B8"/>
+                </a:solidFill>
+              </a:defRPr>
+            </a:pPr>
+          </a:p>
+          <a:p>
+            <a:pPr algn="l">
+              <a:spcBef>
+                <a:spcPts val="500"/>
               </a:spcBef>
               <a:defRPr sz="1200">
                 <a:solidFill>
@@ -8699,11 +8645,11 @@
           <a:p>
             <a:pPr algn="l">
               <a:spcBef>
-                <a:spcPts val="600"/>
-              </a:spcBef>
-              <a:defRPr sz="1200">
-                <a:solidFill>
-                  <a:srgbClr val="94A3B8"/>
+                <a:spcPts val="500"/>
+              </a:spcBef>
+              <a:defRPr sz="1200">
+                <a:solidFill>
+                  <a:srgbClr val="FFFFFF"/>
                 </a:solidFill>
               </a:defRPr>
             </a:pPr>
@@ -8714,11 +8660,11 @@
           <a:p>
             <a:pPr algn="l">
               <a:spcBef>
-                <a:spcPts val="600"/>
-              </a:spcBef>
-              <a:defRPr sz="1200">
-                <a:solidFill>
-                  <a:srgbClr val="94A3B8"/>
+                <a:spcPts val="500"/>
+              </a:spcBef>
+              <a:defRPr sz="1200">
+                <a:solidFill>
+                  <a:srgbClr val="FFFFFF"/>
                 </a:solidFill>
               </a:defRPr>
             </a:pPr>
@@ -8784,7 +8730,7 @@
               </a:defRPr>
             </a:pPr>
             <a:r>
-              <a:t>ADVERSARIAL STRESS-TESTING</a:t>
+              <a:t>ADVERSARIAL LAB</a:t>
             </a:r>
           </a:p>
         </p:txBody>
@@ -8819,7 +8765,7 @@
               </a:defRPr>
             </a:pPr>
             <a:r>
-              <a:t>The Red Team Simulation Engine: 6 Attack Families</a:t>
+              <a:t>The Red Team Simulator: An AI That Attacks Itself</a:t>
             </a:r>
           </a:p>
         </p:txBody>
@@ -8854,7 +8800,7 @@
               </a:defRPr>
             </a:pPr>
             <a:r>
-              <a:t>Challenging the defense system with continuous stochastic synthetic fraud attacks.</a:t>
+              <a:t>Constantly stress-testing our defenses with 6 distinct attack families to eliminate zero-day blind spots.</a:t>
             </a:r>
           </a:p>
         </p:txBody>
@@ -8874,7 +8820,7 @@
             <a:avLst/>
           </a:prstGeom>
           <a:solidFill>
-            <a:srgbClr val="1E293B"/>
+            <a:srgbClr val="161E2E"/>
           </a:solidFill>
           <a:ln w="19050">
             <a:solidFill>
@@ -8908,17 +8854,17 @@
               </a:defRPr>
             </a:pPr>
             <a:r>
-              <a:t>1. Account Takeover (ATO)</a:t>
-            </a:r>
-          </a:p>
-          <a:p>
-            <a:pPr algn="l">
-              <a:spcBef>
-                <a:spcPts val="600"/>
-              </a:spcBef>
-              <a:defRPr sz="1200">
-                <a:solidFill>
-                  <a:srgbClr val="94A3B8"/>
+              <a:t>1. Account Takeover</a:t>
+            </a:r>
+          </a:p>
+          <a:p>
+            <a:pPr algn="l">
+              <a:spcBef>
+                <a:spcPts val="500"/>
+              </a:spcBef>
+              <a:defRPr sz="1200">
+                <a:solidFill>
+                  <a:srgbClr val="FFFFFF"/>
                 </a:solidFill>
               </a:defRPr>
             </a:pPr>
@@ -8929,26 +8875,11 @@
           <a:p>
             <a:pPr algn="l">
               <a:spcBef>
-                <a:spcPts val="600"/>
-              </a:spcBef>
-              <a:defRPr sz="1200">
-                <a:solidFill>
-                  <a:srgbClr val="94A3B8"/>
-                </a:solidFill>
-              </a:defRPr>
-            </a:pPr>
-            <a:r>
-              <a:t>• Elevated transaction amount vs average</a:t>
-            </a:r>
-          </a:p>
-          <a:p>
-            <a:pPr algn="l">
-              <a:spcBef>
-                <a:spcPts val="600"/>
-              </a:spcBef>
-              <a:defRPr sz="1200">
-                <a:solidFill>
-                  <a:srgbClr val="94A3B8"/>
+                <a:spcPts val="500"/>
+              </a:spcBef>
+              <a:defRPr sz="1200">
+                <a:solidFill>
+                  <a:srgbClr val="FFFFFF"/>
                 </a:solidFill>
               </a:defRPr>
             </a:pPr>
@@ -8973,7 +8904,7 @@
             <a:avLst/>
           </a:prstGeom>
           <a:solidFill>
-            <a:srgbClr val="1E293B"/>
+            <a:srgbClr val="161E2E"/>
           </a:solidFill>
           <a:ln w="19050">
             <a:solidFill>
@@ -9007,17 +8938,17 @@
               </a:defRPr>
             </a:pPr>
             <a:r>
-              <a:t>2. Card Testing Micro-Charges</a:t>
-            </a:r>
-          </a:p>
-          <a:p>
-            <a:pPr algn="l">
-              <a:spcBef>
-                <a:spcPts val="600"/>
-              </a:spcBef>
-              <a:defRPr sz="1200">
-                <a:solidFill>
-                  <a:srgbClr val="94A3B8"/>
+              <a:t>2. Card Testing</a:t>
+            </a:r>
+          </a:p>
+          <a:p>
+            <a:pPr algn="l">
+              <a:spcBef>
+                <a:spcPts val="500"/>
+              </a:spcBef>
+              <a:defRPr sz="1200">
+                <a:solidFill>
+                  <a:srgbClr val="FFFFFF"/>
                 </a:solidFill>
               </a:defRPr>
             </a:pPr>
@@ -9028,31 +8959,16 @@
           <a:p>
             <a:pPr algn="l">
               <a:spcBef>
-                <a:spcPts val="600"/>
-              </a:spcBef>
-              <a:defRPr sz="1200">
-                <a:solidFill>
-                  <a:srgbClr val="94A3B8"/>
-                </a:solidFill>
-              </a:defRPr>
-            </a:pPr>
-            <a:r>
-              <a:t>• Micro-amounts (₹1 - ₹100 per test)</a:t>
-            </a:r>
-          </a:p>
-          <a:p>
-            <a:pPr algn="l">
-              <a:spcBef>
-                <a:spcPts val="600"/>
-              </a:spcBef>
-              <a:defRPr sz="1200">
-                <a:solidFill>
-                  <a:srgbClr val="94A3B8"/>
-                </a:solidFill>
-              </a:defRPr>
-            </a:pPr>
-            <a:r>
-              <a:t>• Probing stolen card validity</a:t>
+                <a:spcPts val="500"/>
+              </a:spcBef>
+              <a:defRPr sz="1200">
+                <a:solidFill>
+                  <a:srgbClr val="FFFFFF"/>
+                </a:solidFill>
+              </a:defRPr>
+            </a:pPr>
+            <a:r>
+              <a:t>• Micro-amounts (₹1 - ₹100 probing)</a:t>
             </a:r>
           </a:p>
         </p:txBody>
@@ -9072,7 +8988,7 @@
             <a:avLst/>
           </a:prstGeom>
           <a:solidFill>
-            <a:srgbClr val="1E293B"/>
+            <a:srgbClr val="161E2E"/>
           </a:solidFill>
           <a:ln w="19050">
             <a:solidFill>
@@ -9112,46 +9028,31 @@
           <a:p>
             <a:pPr algn="l">
               <a:spcBef>
-                <a:spcPts val="600"/>
-              </a:spcBef>
-              <a:defRPr sz="1200">
-                <a:solidFill>
-                  <a:srgbClr val="94A3B8"/>
-                </a:solidFill>
-              </a:defRPr>
-            </a:pPr>
-            <a:r>
-              <a:t>• Mimicking user's normal daytime hours</a:t>
-            </a:r>
-          </a:p>
-          <a:p>
-            <a:pPr algn="l">
-              <a:spcBef>
-                <a:spcPts val="600"/>
-              </a:spcBef>
-              <a:defRPr sz="1200">
-                <a:solidFill>
-                  <a:srgbClr val="94A3B8"/>
+                <a:spcPts val="500"/>
+              </a:spcBef>
+              <a:defRPr sz="1200">
+                <a:solidFill>
+                  <a:srgbClr val="FFFFFF"/>
+                </a:solidFill>
+              </a:defRPr>
+            </a:pPr>
+            <a:r>
+              <a:t>• Mimics normal daytime spend</a:t>
+            </a:r>
+          </a:p>
+          <a:p>
+            <a:pPr algn="l">
+              <a:spcBef>
+                <a:spcPts val="500"/>
+              </a:spcBef>
+              <a:defRPr sz="1200">
+                <a:solidFill>
+                  <a:srgbClr val="FFFFFF"/>
                 </a:solidFill>
               </a:defRPr>
             </a:pPr>
             <a:r>
               <a:t>• Near-baseline amounts (0.8x - 1.2x)</a:t>
-            </a:r>
-          </a:p>
-          <a:p>
-            <a:pPr algn="l">
-              <a:spcBef>
-                <a:spcPts val="600"/>
-              </a:spcBef>
-              <a:defRPr sz="1200">
-                <a:solidFill>
-                  <a:srgbClr val="94A3B8"/>
-                </a:solidFill>
-              </a:defRPr>
-            </a:pPr>
-            <a:r>
-              <a:t>• Subtle zero-day camouflage tactics</a:t>
             </a:r>
           </a:p>
         </p:txBody>
@@ -9171,7 +9072,7 @@
             <a:avLst/>
           </a:prstGeom>
           <a:solidFill>
-            <a:srgbClr val="1E293B"/>
+            <a:srgbClr val="161E2E"/>
           </a:solidFill>
           <a:ln w="19050">
             <a:solidFill>
@@ -9205,52 +9106,37 @@
               </a:defRPr>
             </a:pPr>
             <a:r>
-              <a:t>4. Mule Activity</a:t>
-            </a:r>
-          </a:p>
-          <a:p>
-            <a:pPr algn="l">
-              <a:spcBef>
-                <a:spcPts val="600"/>
-              </a:spcBef>
-              <a:defRPr sz="1200">
-                <a:solidFill>
-                  <a:srgbClr val="94A3B8"/>
-                </a:solidFill>
-              </a:defRPr>
-            </a:pPr>
-            <a:r>
-              <a:t>• Fast fund movement to newly created beneficiary</a:t>
-            </a:r>
-          </a:p>
-          <a:p>
-            <a:pPr algn="l">
-              <a:spcBef>
-                <a:spcPts val="600"/>
-              </a:spcBef>
-              <a:defRPr sz="1200">
-                <a:solidFill>
-                  <a:srgbClr val="94A3B8"/>
-                </a:solidFill>
-              </a:defRPr>
-            </a:pPr>
-            <a:r>
-              <a:t>• Moderate IP risk + high amount ratio</a:t>
-            </a:r>
-          </a:p>
-          <a:p>
-            <a:pPr algn="l">
-              <a:spcBef>
-                <a:spcPts val="600"/>
-              </a:spcBef>
-              <a:defRPr sz="1200">
-                <a:solidFill>
-                  <a:srgbClr val="94A3B8"/>
-                </a:solidFill>
-              </a:defRPr>
-            </a:pPr>
-            <a:r>
-              <a:t>• Testing account drain thresholds</a:t>
+              <a:t>4. Rapid Mule Drain</a:t>
+            </a:r>
+          </a:p>
+          <a:p>
+            <a:pPr algn="l">
+              <a:spcBef>
+                <a:spcPts val="500"/>
+              </a:spcBef>
+              <a:defRPr sz="1200">
+                <a:solidFill>
+                  <a:srgbClr val="FFFFFF"/>
+                </a:solidFill>
+              </a:defRPr>
+            </a:pPr>
+            <a:r>
+              <a:t>• High velocity to newly created beneficiary</a:t>
+            </a:r>
+          </a:p>
+          <a:p>
+            <a:pPr algn="l">
+              <a:spcBef>
+                <a:spcPts val="500"/>
+              </a:spcBef>
+              <a:defRPr sz="1200">
+                <a:solidFill>
+                  <a:srgbClr val="FFFFFF"/>
+                </a:solidFill>
+              </a:defRPr>
+            </a:pPr>
+            <a:r>
+              <a:t>• High amount deviation</a:t>
             </a:r>
           </a:p>
         </p:txBody>
@@ -9270,7 +9156,7 @@
             <a:avLst/>
           </a:prstGeom>
           <a:solidFill>
-            <a:srgbClr val="1E293B"/>
+            <a:srgbClr val="161E2E"/>
           </a:solidFill>
           <a:ln w="19050">
             <a:solidFill>
@@ -9310,46 +9196,31 @@
           <a:p>
             <a:pPr algn="l">
               <a:spcBef>
-                <a:spcPts val="600"/>
-              </a:spcBef>
-              <a:defRPr sz="1200">
-                <a:solidFill>
-                  <a:srgbClr val="94A3B8"/>
-                </a:solidFill>
-              </a:defRPr>
-            </a:pPr>
-            <a:r>
-              <a:t>• Genuine user device and credentials</a:t>
-            </a:r>
-          </a:p>
-          <a:p>
-            <a:pPr algn="l">
-              <a:spcBef>
-                <a:spcPts val="600"/>
-              </a:spcBef>
-              <a:defRPr sz="1200">
-                <a:solidFill>
-                  <a:srgbClr val="94A3B8"/>
-                </a:solidFill>
-              </a:defRPr>
-            </a:pPr>
-            <a:r>
-              <a:t>• Severe submit hesitation &amp; active call</a:t>
-            </a:r>
-          </a:p>
-          <a:p>
-            <a:pPr algn="l">
-              <a:spcBef>
-                <a:spcPts val="600"/>
-              </a:spcBef>
-              <a:defRPr sz="1200">
-                <a:solidFill>
-                  <a:srgbClr val="94A3B8"/>
-                </a:solidFill>
-              </a:defRPr>
-            </a:pPr>
-            <a:r>
-              <a:t>• Tests Layer 1 biometric intervention</a:t>
+                <a:spcPts val="500"/>
+              </a:spcBef>
+              <a:defRPr sz="1200">
+                <a:solidFill>
+                  <a:srgbClr val="FFFFFF"/>
+                </a:solidFill>
+              </a:defRPr>
+            </a:pPr>
+            <a:r>
+              <a:t>• Authentic device + active phone call</a:t>
+            </a:r>
+          </a:p>
+          <a:p>
+            <a:pPr algn="l">
+              <a:spcBef>
+                <a:spcPts val="500"/>
+              </a:spcBef>
+              <a:defRPr sz="1200">
+                <a:solidFill>
+                  <a:srgbClr val="FFFFFF"/>
+                </a:solidFill>
+              </a:defRPr>
+            </a:pPr>
+            <a:r>
+              <a:t>• Severe hesitation and backspaces</a:t>
             </a:r>
           </a:p>
         </p:txBody>
@@ -9369,7 +9240,7 @@
             <a:avLst/>
           </a:prstGeom>
           <a:solidFill>
-            <a:srgbClr val="1E293B"/>
+            <a:srgbClr val="161E2E"/>
           </a:solidFill>
           <a:ln w="19050">
             <a:solidFill>
@@ -9409,46 +9280,31 @@
           <a:p>
             <a:pPr algn="l">
               <a:spcBef>
-                <a:spcPts val="600"/>
-              </a:spcBef>
-              <a:defRPr sz="1200">
-                <a:solidFill>
-                  <a:srgbClr val="94A3B8"/>
-                </a:solidFill>
-              </a:defRPr>
-            </a:pPr>
-            <a:r>
-              <a:t>• Coordinated cyclic fund loops</a:t>
-            </a:r>
-          </a:p>
-          <a:p>
-            <a:pPr algn="l">
-              <a:spcBef>
-                <a:spcPts val="600"/>
-              </a:spcBef>
-              <a:defRPr sz="1200">
-                <a:solidFill>
-                  <a:srgbClr val="94A3B8"/>
-                </a:solidFill>
-              </a:defRPr>
-            </a:pPr>
-            <a:r>
-              <a:t>• Multi-account fan-out smurfing</a:t>
-            </a:r>
-          </a:p>
-          <a:p>
-            <a:pPr algn="l">
-              <a:spcBef>
-                <a:spcPts val="600"/>
-              </a:spcBef>
-              <a:defRPr sz="1200">
-                <a:solidFill>
-                  <a:srgbClr val="94A3B8"/>
-                </a:solidFill>
-              </a:defRPr>
-            </a:pPr>
-            <a:r>
-              <a:t>• Tests Layer 3 GNN graph detection</a:t>
+                <a:spcPts val="500"/>
+              </a:spcBef>
+              <a:defRPr sz="1200">
+                <a:solidFill>
+                  <a:srgbClr val="FFFFFF"/>
+                </a:solidFill>
+              </a:defRPr>
+            </a:pPr>
+            <a:r>
+              <a:t>• Multi-account cyclic fund loops</a:t>
+            </a:r>
+          </a:p>
+          <a:p>
+            <a:pPr algn="l">
+              <a:spcBef>
+                <a:spcPts val="500"/>
+              </a:spcBef>
+              <a:defRPr sz="1200">
+                <a:solidFill>
+                  <a:srgbClr val="FFFFFF"/>
+                </a:solidFill>
+              </a:defRPr>
+            </a:pPr>
+            <a:r>
+              <a:t>• Fan-out smurfing across clusters</a:t>
             </a:r>
           </a:p>
         </p:txBody>
@@ -9509,7 +9365,7 @@
               </a:defRPr>
             </a:pPr>
             <a:r>
-              <a:t>CONTINUOUS LEARNING</a:t>
+              <a:t>SELF-HEALING AI</a:t>
             </a:r>
           </a:p>
         </p:txBody>
@@ -9544,7 +9400,7 @@
               </a:defRPr>
             </a:pPr>
             <a:r>
-              <a:t>Closed-Loop Adversarial Retraining with Balanced Replay</a:t>
+              <a:t>Closed-Loop Retraining: Learning from Every Miss</a:t>
             </a:r>
           </a:p>
         </p:txBody>
@@ -9579,7 +9435,7 @@
               </a:defRPr>
             </a:pPr>
             <a:r>
-              <a:t>Turning missed attacks into fortified defensive weights while holding False Positives under 0.8%.</a:t>
+              <a:t>How our model turns missed attacks into defensive armor while keeping False Alarms under 0.8%.</a:t>
             </a:r>
           </a:p>
         </p:txBody>
@@ -9599,7 +9455,7 @@
             <a:avLst/>
           </a:prstGeom>
           <a:solidFill>
-            <a:srgbClr val="1E293B"/>
+            <a:srgbClr val="161E2E"/>
           </a:solidFill>
           <a:ln w="19050">
             <a:solidFill>
@@ -9633,181 +9489,166 @@
               </a:defRPr>
             </a:pPr>
             <a:r>
-              <a:t>The Closed-Loop Retraining Pipeline</a:t>
-            </a:r>
-          </a:p>
-          <a:p>
-            <a:pPr algn="l">
-              <a:spcBef>
-                <a:spcPts val="600"/>
-              </a:spcBef>
-              <a:defRPr sz="1200">
-                <a:solidFill>
-                  <a:srgbClr val="94A3B8"/>
-                </a:solidFill>
-              </a:defRPr>
-            </a:pPr>
-            <a:r>
-              <a:t>How the Model Learns Without Forgetting:</a:t>
-            </a:r>
-          </a:p>
-          <a:p>
-            <a:pPr algn="l">
-              <a:spcBef>
-                <a:spcPts val="600"/>
-              </a:spcBef>
-              <a:defRPr sz="1200">
-                <a:solidFill>
-                  <a:srgbClr val="94A3B8"/>
-                </a:solidFill>
-              </a:defRPr>
-            </a:pPr>
-          </a:p>
-          <a:p>
-            <a:pPr algn="l">
-              <a:spcBef>
-                <a:spcPts val="600"/>
-              </a:spcBef>
-              <a:defRPr sz="1200">
-                <a:solidFill>
-                  <a:srgbClr val="94A3B8"/>
-                </a:solidFill>
-              </a:defRPr>
-            </a:pPr>
-            <a:r>
-              <a:t>1. Red Team launches 5,000 synthetic attacks.</a:t>
-            </a:r>
-          </a:p>
-          <a:p>
-            <a:pPr algn="l">
-              <a:spcBef>
-                <a:spcPts val="600"/>
-              </a:spcBef>
-              <a:defRPr sz="1200">
-                <a:solidFill>
-                  <a:srgbClr val="94A3B8"/>
-                </a:solidFill>
-              </a:defRPr>
-            </a:pPr>
-            <a:r>
-              <a:t>2. Blue Team scores transactions and records missed cases.</a:t>
-            </a:r>
-          </a:p>
-          <a:p>
-            <a:pPr algn="l">
-              <a:spcBef>
-                <a:spcPts val="600"/>
-              </a:spcBef>
-              <a:defRPr sz="1200">
-                <a:solidFill>
-                  <a:srgbClr val="94A3B8"/>
-                </a:solidFill>
-              </a:defRPr>
-            </a:pPr>
-            <a:r>
-              <a:t>3. Missed attacks stored in database as candidate training data.</a:t>
-            </a:r>
-          </a:p>
-          <a:p>
-            <a:pPr algn="l">
-              <a:spcBef>
-                <a:spcPts val="600"/>
-              </a:spcBef>
-              <a:defRPr sz="1200">
-                <a:solidFill>
-                  <a:srgbClr val="94A3B8"/>
-                </a:solidFill>
-              </a:defRPr>
-            </a:pPr>
-            <a:r>
-              <a:t>4. Balanced Replay Buffer generated:</a:t>
-            </a:r>
-          </a:p>
-          <a:p>
-            <a:pPr algn="l">
-              <a:spcBef>
-                <a:spcPts val="600"/>
-              </a:spcBef>
-              <a:defRPr sz="1200">
-                <a:solidFill>
-                  <a:srgbClr val="94A3B8"/>
-                </a:solidFill>
-              </a:defRPr>
-            </a:pPr>
-            <a:r>
-              <a:t>   • 1,200 normal benign payments (Negative Anchor)</a:t>
-            </a:r>
-          </a:p>
-          <a:p>
-            <a:pPr algn="l">
-              <a:spcBef>
-                <a:spcPts val="600"/>
-              </a:spcBef>
-              <a:defRPr sz="1200">
-                <a:solidFill>
-                  <a:srgbClr val="94A3B8"/>
-                </a:solidFill>
-              </a:defRPr>
-            </a:pPr>
-            <a:r>
-              <a:t>   • Captured adversarial misses (Positive Class)</a:t>
-            </a:r>
-          </a:p>
-          <a:p>
-            <a:pPr algn="l">
-              <a:spcBef>
-                <a:spcPts val="600"/>
-              </a:spcBef>
-              <a:defRPr sz="1200">
-                <a:solidFill>
-                  <a:srgbClr val="94A3B8"/>
-                </a:solidFill>
-              </a:defRPr>
-            </a:pPr>
-            <a:r>
-              <a:t>5. Retrains XGBoost with cross-entropy loss and early stopping.</a:t>
-            </a:r>
-          </a:p>
-          <a:p>
-            <a:pPr algn="l">
-              <a:spcBef>
-                <a:spcPts val="600"/>
-              </a:spcBef>
-              <a:defRPr sz="1200">
-                <a:solidFill>
-                  <a:srgbClr val="94A3B8"/>
-                </a:solidFill>
-              </a:defRPr>
-            </a:pPr>
-            <a:r>
-              <a:t>6. Serializes fortified model to disk for all worker nodes.</a:t>
-            </a:r>
-          </a:p>
-          <a:p>
-            <a:pPr algn="l">
-              <a:spcBef>
-                <a:spcPts val="600"/>
-              </a:spcBef>
-              <a:defRPr sz="1200">
-                <a:solidFill>
-                  <a:srgbClr val="94A3B8"/>
-                </a:solidFill>
-              </a:defRPr>
-            </a:pPr>
-          </a:p>
-          <a:p>
-            <a:pPr algn="l">
-              <a:spcBef>
-                <a:spcPts val="600"/>
-              </a:spcBef>
-              <a:defRPr sz="1200">
-                <a:solidFill>
-                  <a:srgbClr val="FFFFFF"/>
-                </a:solidFill>
-              </a:defRPr>
-            </a:pPr>
-            <a:r>
-              <a:t>✓ Prevents Catastrophic Forgetting &amp; Decision Boundary Drift.</a:t>
+              <a:t>The Secret: Balanced Replay Buffers</a:t>
+            </a:r>
+          </a:p>
+          <a:p>
+            <a:pPr algn="l">
+              <a:spcBef>
+                <a:spcPts val="500"/>
+              </a:spcBef>
+              <a:defRPr sz="1200">
+                <a:solidFill>
+                  <a:srgbClr val="94A3B8"/>
+                </a:solidFill>
+              </a:defRPr>
+            </a:pPr>
+            <a:r>
+              <a:t>The Danger of Naive Retraining:</a:t>
+            </a:r>
+          </a:p>
+          <a:p>
+            <a:pPr algn="l">
+              <a:spcBef>
+                <a:spcPts val="500"/>
+              </a:spcBef>
+              <a:defRPr sz="1200">
+                <a:solidFill>
+                  <a:srgbClr val="FFFFFF"/>
+                </a:solidFill>
+              </a:defRPr>
+            </a:pPr>
+            <a:r>
+              <a:t>• If a model only trains on new fraud, it forgets what normal users look like (Catastrophic Forgetting).</a:t>
+            </a:r>
+          </a:p>
+          <a:p>
+            <a:pPr algn="l">
+              <a:spcBef>
+                <a:spcPts val="500"/>
+              </a:spcBef>
+              <a:defRPr sz="1200">
+                <a:solidFill>
+                  <a:srgbClr val="FFFFFF"/>
+                </a:solidFill>
+              </a:defRPr>
+            </a:pPr>
+            <a:r>
+              <a:t>• Result: Genuine customers get blocked, causing outrage.</a:t>
+            </a:r>
+          </a:p>
+          <a:p>
+            <a:pPr algn="l">
+              <a:spcBef>
+                <a:spcPts val="500"/>
+              </a:spcBef>
+              <a:defRPr sz="1200">
+                <a:solidFill>
+                  <a:srgbClr val="94A3B8"/>
+                </a:solidFill>
+              </a:defRPr>
+            </a:pPr>
+          </a:p>
+          <a:p>
+            <a:pPr algn="l">
+              <a:spcBef>
+                <a:spcPts val="500"/>
+              </a:spcBef>
+              <a:defRPr sz="1200">
+                <a:solidFill>
+                  <a:srgbClr val="94A3B8"/>
+                </a:solidFill>
+              </a:defRPr>
+            </a:pPr>
+            <a:r>
+              <a:t>Our Balanced Replay Solution:</a:t>
+            </a:r>
+          </a:p>
+          <a:p>
+            <a:pPr algn="l">
+              <a:spcBef>
+                <a:spcPts val="500"/>
+              </a:spcBef>
+              <a:defRPr sz="1200">
+                <a:solidFill>
+                  <a:srgbClr val="FFFFFF"/>
+                </a:solidFill>
+              </a:defRPr>
+            </a:pPr>
+            <a:r>
+              <a:t>• Captures missed Red Team attacks.</a:t>
+            </a:r>
+          </a:p>
+          <a:p>
+            <a:pPr algn="l">
+              <a:spcBef>
+                <a:spcPts val="500"/>
+              </a:spcBef>
+              <a:defRPr sz="1200">
+                <a:solidFill>
+                  <a:srgbClr val="FFFFFF"/>
+                </a:solidFill>
+              </a:defRPr>
+            </a:pPr>
+            <a:r>
+              <a:t>• Injects 1,200 normal benign transactions alongside them.</a:t>
+            </a:r>
+          </a:p>
+          <a:p>
+            <a:pPr algn="l">
+              <a:spcBef>
+                <a:spcPts val="500"/>
+              </a:spcBef>
+              <a:defRPr sz="1200">
+                <a:solidFill>
+                  <a:srgbClr val="FFFFFF"/>
+                </a:solidFill>
+              </a:defRPr>
+            </a:pPr>
+            <a:r>
+              <a:t>• Retrains XGBoost with cross-entropy loss and early stopping.</a:t>
+            </a:r>
+          </a:p>
+          <a:p>
+            <a:pPr algn="l">
+              <a:spcBef>
+                <a:spcPts val="500"/>
+              </a:spcBef>
+              <a:defRPr sz="1200">
+                <a:solidFill>
+                  <a:srgbClr val="FFFFFF"/>
+                </a:solidFill>
+              </a:defRPr>
+            </a:pPr>
+            <a:r>
+              <a:t>• Serializes fortified weights directly to disk.</a:t>
+            </a:r>
+          </a:p>
+          <a:p>
+            <a:pPr algn="l">
+              <a:spcBef>
+                <a:spcPts val="500"/>
+              </a:spcBef>
+              <a:defRPr sz="1200">
+                <a:solidFill>
+                  <a:srgbClr val="94A3B8"/>
+                </a:solidFill>
+              </a:defRPr>
+            </a:pPr>
+          </a:p>
+          <a:p>
+            <a:pPr algn="l">
+              <a:spcBef>
+                <a:spcPts val="500"/>
+              </a:spcBef>
+              <a:defRPr sz="1200">
+                <a:solidFill>
+                  <a:srgbClr val="FFFFFF"/>
+                </a:solidFill>
+              </a:defRPr>
+            </a:pPr>
+            <a:r>
+              <a:t>✓ Retains 100% normal user accuracy with zero forgetting.</a:t>
             </a:r>
           </a:p>
         </p:txBody>
@@ -9827,7 +9668,7 @@
             <a:avLst/>
           </a:prstGeom>
           <a:solidFill>
-            <a:srgbClr val="1E293B"/>
+            <a:srgbClr val="161E2E"/>
           </a:solidFill>
           <a:ln w="19050">
             <a:solidFill>
@@ -9867,26 +9708,26 @@
           <a:p>
             <a:pPr algn="l">
               <a:spcBef>
-                <a:spcPts val="600"/>
-              </a:spcBef>
-              <a:defRPr sz="1200">
-                <a:solidFill>
-                  <a:srgbClr val="94A3B8"/>
-                </a:solidFill>
-              </a:defRPr>
-            </a:pPr>
-            <a:r>
-              <a:t>Round 2 (Baseline Initial Model):</a:t>
-            </a:r>
-          </a:p>
-          <a:p>
-            <a:pPr algn="l">
-              <a:spcBef>
-                <a:spcPts val="600"/>
-              </a:spcBef>
-              <a:defRPr sz="1200">
-                <a:solidFill>
-                  <a:srgbClr val="94A3B8"/>
+                <a:spcPts val="500"/>
+              </a:spcBef>
+              <a:defRPr sz="1200">
+                <a:solidFill>
+                  <a:srgbClr val="94A3B8"/>
+                </a:solidFill>
+              </a:defRPr>
+            </a:pPr>
+            <a:r>
+              <a:t>Round 2 (Initial Baseline Model):</a:t>
+            </a:r>
+          </a:p>
+          <a:p>
+            <a:pPr algn="l">
+              <a:spcBef>
+                <a:spcPts val="500"/>
+              </a:spcBef>
+              <a:defRPr sz="1200">
+                <a:solidFill>
+                  <a:srgbClr val="FFFFFF"/>
                 </a:solidFill>
               </a:defRPr>
             </a:pPr>
@@ -9897,11 +9738,11 @@
           <a:p>
             <a:pPr algn="l">
               <a:spcBef>
-                <a:spcPts val="600"/>
-              </a:spcBef>
-              <a:defRPr sz="1200">
-                <a:solidFill>
-                  <a:srgbClr val="94A3B8"/>
+                <a:spcPts val="500"/>
+              </a:spcBef>
+              <a:defRPr sz="1200">
+                <a:solidFill>
+                  <a:srgbClr val="FFFFFF"/>
                 </a:solidFill>
               </a:defRPr>
             </a:pPr>
@@ -9912,11 +9753,11 @@
           <a:p>
             <a:pPr algn="l">
               <a:spcBef>
-                <a:spcPts val="600"/>
-              </a:spcBef>
-              <a:defRPr sz="1200">
-                <a:solidFill>
-                  <a:srgbClr val="94A3B8"/>
+                <a:spcPts val="500"/>
+              </a:spcBef>
+              <a:defRPr sz="1200">
+                <a:solidFill>
+                  <a:srgbClr val="FFFFFF"/>
                 </a:solidFill>
               </a:defRPr>
             </a:pPr>
@@ -9927,19 +9768,19 @@
           <a:p>
             <a:pPr algn="l">
               <a:spcBef>
-                <a:spcPts val="600"/>
-              </a:spcBef>
-              <a:defRPr sz="1200">
-                <a:solidFill>
-                  <a:srgbClr val="94A3B8"/>
-                </a:solidFill>
-              </a:defRPr>
-            </a:pPr>
-          </a:p>
-          <a:p>
-            <a:pPr algn="l">
-              <a:spcBef>
-                <a:spcPts val="600"/>
+                <a:spcPts val="500"/>
+              </a:spcBef>
+              <a:defRPr sz="1200">
+                <a:solidFill>
+                  <a:srgbClr val="94A3B8"/>
+                </a:solidFill>
+              </a:defRPr>
+            </a:pPr>
+          </a:p>
+          <a:p>
+            <a:pPr algn="l">
+              <a:spcBef>
+                <a:spcPts val="500"/>
               </a:spcBef>
               <a:defRPr sz="1200">
                 <a:solidFill>
@@ -9954,11 +9795,11 @@
           <a:p>
             <a:pPr algn="l">
               <a:spcBef>
-                <a:spcPts val="600"/>
-              </a:spcBef>
-              <a:defRPr sz="1200">
-                <a:solidFill>
-                  <a:srgbClr val="94A3B8"/>
+                <a:spcPts val="500"/>
+              </a:spcBef>
+              <a:defRPr sz="1200">
+                <a:solidFill>
+                  <a:srgbClr val="FFFFFF"/>
                 </a:solidFill>
               </a:defRPr>
             </a:pPr>
@@ -9969,11 +9810,11 @@
           <a:p>
             <a:pPr algn="l">
               <a:spcBef>
-                <a:spcPts val="600"/>
-              </a:spcBef>
-              <a:defRPr sz="1200">
-                <a:solidFill>
-                  <a:srgbClr val="94A3B8"/>
+                <a:spcPts val="500"/>
+              </a:spcBef>
+              <a:defRPr sz="1200">
+                <a:solidFill>
+                  <a:srgbClr val="FFFFFF"/>
                 </a:solidFill>
               </a:defRPr>
             </a:pPr>
@@ -9984,11 +9825,11 @@
           <a:p>
             <a:pPr algn="l">
               <a:spcBef>
-                <a:spcPts val="600"/>
-              </a:spcBef>
-              <a:defRPr sz="1200">
-                <a:solidFill>
-                  <a:srgbClr val="94A3B8"/>
+                <a:spcPts val="500"/>
+              </a:spcBef>
+              <a:defRPr sz="1200">
+                <a:solidFill>
+                  <a:srgbClr val="FFFFFF"/>
                 </a:solidFill>
               </a:defRPr>
             </a:pPr>
@@ -9999,43 +9840,43 @@
           <a:p>
             <a:pPr algn="l">
               <a:spcBef>
-                <a:spcPts val="600"/>
-              </a:spcBef>
-              <a:defRPr sz="1200">
-                <a:solidFill>
-                  <a:srgbClr val="94A3B8"/>
-                </a:solidFill>
-              </a:defRPr>
-            </a:pPr>
-          </a:p>
-          <a:p>
-            <a:pPr algn="l">
-              <a:spcBef>
-                <a:spcPts val="600"/>
-              </a:spcBef>
-              <a:defRPr sz="1200">
-                <a:solidFill>
-                  <a:srgbClr val="FFFFFF"/>
-                </a:solidFill>
-              </a:defRPr>
-            </a:pPr>
-            <a:r>
-              <a:t>★ False Negative Reduction: 97.15%</a:t>
-            </a:r>
-          </a:p>
-          <a:p>
-            <a:pPr algn="l">
-              <a:spcBef>
-                <a:spcPts val="600"/>
-              </a:spcBef>
-              <a:defRPr sz="1200">
-                <a:solidFill>
-                  <a:srgbClr val="FFFFFF"/>
-                </a:solidFill>
-              </a:defRPr>
-            </a:pPr>
-            <a:r>
-              <a:t>★ False Positive Rate: Held at &lt;0.8%</a:t>
+                <a:spcPts val="500"/>
+              </a:spcBef>
+              <a:defRPr sz="1200">
+                <a:solidFill>
+                  <a:srgbClr val="94A3B8"/>
+                </a:solidFill>
+              </a:defRPr>
+            </a:pPr>
+          </a:p>
+          <a:p>
+            <a:pPr algn="l">
+              <a:spcBef>
+                <a:spcPts val="500"/>
+              </a:spcBef>
+              <a:defRPr sz="1200">
+                <a:solidFill>
+                  <a:srgbClr val="FFFFFF"/>
+                </a:solidFill>
+              </a:defRPr>
+            </a:pPr>
+            <a:r>
+              <a:t>★ False Negatives Slashed by 97.15%</a:t>
+            </a:r>
+          </a:p>
+          <a:p>
+            <a:pPr algn="l">
+              <a:spcBef>
+                <a:spcPts val="500"/>
+              </a:spcBef>
+              <a:defRPr sz="1200">
+                <a:solidFill>
+                  <a:srgbClr val="FFFFFF"/>
+                </a:solidFill>
+              </a:defRPr>
+            </a:pPr>
+            <a:r>
+              <a:t>★ False Positive Rate Held at &lt;0.8%</a:t>
             </a:r>
           </a:p>
         </p:txBody>

--- a/docs/AI_Defense_Lab_Presentation.pptx
+++ b/docs/AI_Defense_Lab_Presentation.pptx
@@ -3545,7 +3545,7 @@
               </a:defRPr>
             </a:pPr>
             <a:r>
-              <a:t>Team: AITIANS  |  Army Institute of Technology, Pune</a:t>
+              <a:t>Team: IRON  |  AI Defense Lab</a:t>
             </a:r>
           </a:p>
         </p:txBody>
@@ -5051,7 +5051,7 @@
               </a:defRPr>
             </a:pPr>
             <a:r>
-              <a:t>Team AITIANS — Final Takeaway</a:t>
+              <a:t>Team IRON — Final Takeaway</a:t>
             </a:r>
           </a:p>
           <a:p>
@@ -5147,7 +5147,7 @@
               </a:defRPr>
             </a:pPr>
             <a:r>
-              <a:t>Team: AITIANS (Army Institute of Technology, Pune)</a:t>
+              <a:t>Team: IRON</a:t>
             </a:r>
           </a:p>
           <a:p>

--- a/docs/AI_Defense_Lab_Presentation.pptx
+++ b/docs/AI_Defense_Lab_Presentation.pptx
@@ -3540,12 +3540,12 @@
             <a:pPr>
               <a:defRPr sz="1200">
                 <a:solidFill>
-                  <a:srgbClr val="94A3B8"/>
-                </a:solidFill>
-              </a:defRPr>
-            </a:pPr>
-            <a:r>
-              <a:t>Team: IRON  |  AI Defense Lab</a:t>
+                  <a:srgbClr val="F59E0B"/>
+                </a:solidFill>
+              </a:defRPr>
+            </a:pPr>
+            <a:r>
+              <a:t>Team: IRON  |  Live Prototype: https://defense-six.vercel.app/  |  GitHub: https://github.com/Abhay-s-8/defense</a:t>
             </a:r>
           </a:p>
         </p:txBody>
@@ -5142,27 +5142,42 @@
               </a:spcBef>
               <a:defRPr sz="1200">
                 <a:solidFill>
-                  <a:srgbClr val="94A3B8"/>
-                </a:solidFill>
-              </a:defRPr>
-            </a:pPr>
-            <a:r>
-              <a:t>Team: IRON</a:t>
-            </a:r>
-          </a:p>
-          <a:p>
-            <a:pPr algn="l">
-              <a:spcBef>
-                <a:spcPts val="500"/>
-              </a:spcBef>
-              <a:defRPr sz="1200">
-                <a:solidFill>
-                  <a:srgbClr val="94A3B8"/>
-                </a:solidFill>
-              </a:defRPr>
-            </a:pPr>
-            <a:r>
-              <a:t>GitHub: github.com/Abhay-s-8/defense</a:t>
+                  <a:srgbClr val="FFFFFF"/>
+                </a:solidFill>
+              </a:defRPr>
+            </a:pPr>
+            <a:r>
+              <a:t>★ Team: IRON</a:t>
+            </a:r>
+          </a:p>
+          <a:p>
+            <a:pPr algn="l">
+              <a:spcBef>
+                <a:spcPts val="500"/>
+              </a:spcBef>
+              <a:defRPr sz="1200">
+                <a:solidFill>
+                  <a:srgbClr val="FFFFFF"/>
+                </a:solidFill>
+              </a:defRPr>
+            </a:pPr>
+            <a:r>
+              <a:t>★ Live Prototype: https://defense-six.vercel.app/</a:t>
+            </a:r>
+          </a:p>
+          <a:p>
+            <a:pPr algn="l">
+              <a:spcBef>
+                <a:spcPts val="500"/>
+              </a:spcBef>
+              <a:defRPr sz="1200">
+                <a:solidFill>
+                  <a:srgbClr val="FFFFFF"/>
+                </a:solidFill>
+              </a:defRPr>
+            </a:pPr>
+            <a:r>
+              <a:t>★ GitHub Repo: https://github.com/Abhay-s-8/defense</a:t>
             </a:r>
           </a:p>
         </p:txBody>
